--- a/docs/poster/AX성과공유회_포스터_개발을기다리지않았다.pptx
+++ b/docs/poster/AX성과공유회_포스터_개발을기다리지않았다.pptx
@@ -3387,7 +3387,7 @@
                 </a:solidFill>
                 <a:latin typeface="맑은 고딕"/>
               </a:rPr>
-              <a:t>AI와 함께 만든 현업 업무혁신 — 개발 리소스 없이 3일 만에 구축한</a:t>
+              <a:t>AI와 함께 만든 현업 업무혁신 — 개발 리소스 없이 엿새 만에 구축한</a:t>
             </a:r>
           </a:p>
           <a:p>
@@ -3767,7 +3767,7 @@
                 </a:solidFill>
                 <a:latin typeface="맑은 고딕"/>
               </a:rPr>
-              <a:t>3일</a:t>
+              <a:t>6일</a:t>
             </a:r>
           </a:p>
         </p:txBody>
@@ -3809,7 +3809,7 @@
                 </a:solidFill>
                 <a:latin typeface="맑은 고딕"/>
               </a:rPr>
-              <a:t>실작업 30시간 · 1명</a:t>
+              <a:t>실작업 36시간 · 1명</a:t>
             </a:r>
           </a:p>
         </p:txBody>
@@ -3895,7 +3895,7 @@
                 </a:solidFill>
                 <a:latin typeface="맑은 고딕"/>
               </a:rPr>
-              <a:t>외주 추정 4~5개월</a:t>
+              <a:t>외주 추정 5~6개월</a:t>
             </a:r>
           </a:p>
         </p:txBody>
@@ -4071,7 +4071,7 @@
                 </a:solidFill>
                 <a:latin typeface="맑은 고딕"/>
               </a:rPr>
-              <a:t>0.19 M/M</a:t>
+              <a:t>0.23 M/M</a:t>
             </a:r>
           </a:p>
         </p:txBody>
@@ -4199,7 +4199,7 @@
                 </a:solidFill>
                 <a:latin typeface="맑은 고딕"/>
               </a:rPr>
-              <a:t>외주 추정 16 M/M</a:t>
+              <a:t>외주 추정 19 M/M</a:t>
             </a:r>
           </a:p>
         </p:txBody>
@@ -4375,7 +4375,7 @@
                 </a:solidFill>
                 <a:latin typeface="맑은 고딕"/>
               </a:rPr>
-              <a:t>약 250만 원</a:t>
+              <a:t>약 313만 원</a:t>
             </a:r>
           </a:p>
         </p:txBody>
@@ -4503,7 +4503,7 @@
                 </a:solidFill>
                 <a:latin typeface="맑은 고딕"/>
               </a:rPr>
-              <a:t>외주 추정 약 2.0억 원</a:t>
+              <a:t>외주 추정 약 2.3억 원</a:t>
             </a:r>
           </a:p>
         </p:txBody>
@@ -4679,7 +4679,7 @@
                 </a:solidFill>
                 <a:latin typeface="맑은 고딕"/>
               </a:rPr>
-              <a:t>약 80배</a:t>
+              <a:t>약 74배</a:t>
             </a:r>
           </a:p>
         </p:txBody>
@@ -4721,7 +4721,7 @@
                 </a:solidFill>
                 <a:latin typeface="맑은 고딕"/>
               </a:rPr>
-              <a:t>약 1억 9,750만 원 절감</a:t>
+              <a:t>약 2억 2,687만 원 절감</a:t>
             </a:r>
           </a:p>
         </p:txBody>
@@ -4807,7 +4807,7 @@
                 </a:solidFill>
                 <a:latin typeface="맑은 고딕"/>
               </a:rPr>
-              <a:t>비용 기준 98.7%↓</a:t>
+              <a:t>비용 기준 98.6%↓</a:t>
             </a:r>
           </a:p>
         </p:txBody>
@@ -5657,7 +5657,7 @@
         <p:spPr>
           <a:xfrm>
             <a:off x="1080000" y="12924000"/>
-            <a:ext cx="4617000" cy="2520000"/>
+            <a:ext cx="3643200" cy="2520000"/>
           </a:xfrm>
           <a:prstGeom prst="roundRect">
             <a:avLst>
@@ -5705,7 +5705,7 @@
         <p:spPr>
           <a:xfrm>
             <a:off x="1080000" y="12924000"/>
-            <a:ext cx="4617000" cy="828000"/>
+            <a:ext cx="3643200" cy="828000"/>
           </a:xfrm>
           <a:prstGeom prst="rect">
             <a:avLst/>
@@ -5749,7 +5749,7 @@
         <p:spPr>
           <a:xfrm>
             <a:off x="1080000" y="13752000"/>
-            <a:ext cx="4617000" cy="18000"/>
+            <a:ext cx="3643200" cy="18000"/>
           </a:xfrm>
           <a:prstGeom prst="rect">
             <a:avLst/>
@@ -5834,8 +5834,8 @@
         </p:nvSpPr>
         <p:spPr>
           <a:xfrm>
-            <a:off x="1332000" y="13338000"/>
-            <a:ext cx="4113000" cy="396000"/>
+            <a:off x="1296000" y="13338000"/>
+            <a:ext cx="3211200" cy="396000"/>
           </a:xfrm>
           <a:prstGeom prst="rect">
             <a:avLst/>
@@ -5860,7 +5860,7 @@
               </a:spcAft>
             </a:pPr>
             <a:r>
-              <a:rPr sz="1600" b="1">
+              <a:rPr sz="1500" b="1">
                 <a:solidFill>
                   <a:srgbClr val="0F2A47"/>
                 </a:solidFill>
@@ -5879,8 +5879,8 @@
         </p:nvSpPr>
         <p:spPr>
           <a:xfrm>
-            <a:off x="1332000" y="13932000"/>
-            <a:ext cx="4149000" cy="7200000"/>
+            <a:off x="1296000" y="13932000"/>
+            <a:ext cx="3247200" cy="7200000"/>
           </a:xfrm>
           <a:prstGeom prst="rect">
             <a:avLst/>
@@ -5901,11 +5901,11 @@
                 <a:spcPts val="0"/>
               </a:spcBef>
               <a:spcAft>
-                <a:spcPts val="320"/>
-              </a:spcAft>
-            </a:pPr>
-            <a:r>
-              <a:rPr sz="1350" b="0">
+                <a:spcPts val="300"/>
+              </a:spcAft>
+            </a:pPr>
+            <a:r>
+              <a:rPr sz="1250" b="0">
                 <a:solidFill>
                   <a:srgbClr val="4B5A6E"/>
                 </a:solidFill>
@@ -5923,11 +5923,11 @@
                 <a:spcPts val="0"/>
               </a:spcBef>
               <a:spcAft>
-                <a:spcPts val="320"/>
-              </a:spcAft>
-            </a:pPr>
-            <a:r>
-              <a:rPr sz="1350" b="0">
+                <a:spcPts val="300"/>
+              </a:spcAft>
+            </a:pPr>
+            <a:r>
+              <a:rPr sz="1250" b="0">
                 <a:solidFill>
                   <a:srgbClr val="4B5A6E"/>
                 </a:solidFill>
@@ -5949,7 +5949,7 @@
               </a:spcAft>
             </a:pPr>
             <a:r>
-              <a:rPr sz="1350" b="0">
+              <a:rPr sz="1250" b="0">
                 <a:solidFill>
                   <a:srgbClr val="4B5A6E"/>
                 </a:solidFill>
@@ -5968,8 +5968,8 @@
         </p:nvSpPr>
         <p:spPr>
           <a:xfrm>
-            <a:off x="5949000" y="12924000"/>
-            <a:ext cx="4617000" cy="2520000"/>
+            <a:off x="4975200" y="12924000"/>
+            <a:ext cx="3643200" cy="2520000"/>
           </a:xfrm>
           <a:prstGeom prst="roundRect">
             <a:avLst>
@@ -6016,8 +6016,8 @@
         </p:nvSpPr>
         <p:spPr>
           <a:xfrm>
-            <a:off x="5949000" y="12924000"/>
-            <a:ext cx="4617000" cy="828000"/>
+            <a:off x="4975200" y="12924000"/>
+            <a:ext cx="3643200" cy="828000"/>
           </a:xfrm>
           <a:prstGeom prst="rect">
             <a:avLst/>
@@ -6060,8 +6060,8 @@
         </p:nvSpPr>
         <p:spPr>
           <a:xfrm>
-            <a:off x="5949000" y="13752000"/>
-            <a:ext cx="4617000" cy="18000"/>
+            <a:off x="4975200" y="13752000"/>
+            <a:ext cx="3643200" cy="18000"/>
           </a:xfrm>
           <a:prstGeom prst="rect">
             <a:avLst/>
@@ -6104,7 +6104,7 @@
         </p:nvSpPr>
         <p:spPr>
           <a:xfrm>
-            <a:off x="6201000" y="13068000"/>
+            <a:off x="5227200" y="13068000"/>
             <a:ext cx="432000" cy="324000"/>
           </a:xfrm>
           <a:prstGeom prst="rect">
@@ -6146,8 +6146,8 @@
         </p:nvSpPr>
         <p:spPr>
           <a:xfrm>
-            <a:off x="6201000" y="13338000"/>
-            <a:ext cx="4113000" cy="396000"/>
+            <a:off x="5191200" y="13338000"/>
+            <a:ext cx="3211200" cy="396000"/>
           </a:xfrm>
           <a:prstGeom prst="rect">
             <a:avLst/>
@@ -6172,7 +6172,7 @@
               </a:spcAft>
             </a:pPr>
             <a:r>
-              <a:rPr sz="1600" b="1">
+              <a:rPr sz="1500" b="1">
                 <a:solidFill>
                   <a:srgbClr val="0F2A47"/>
                 </a:solidFill>
@@ -6191,8 +6191,8 @@
         </p:nvSpPr>
         <p:spPr>
           <a:xfrm>
-            <a:off x="6201000" y="13932000"/>
-            <a:ext cx="4149000" cy="7200000"/>
+            <a:off x="5191200" y="13932000"/>
+            <a:ext cx="3247200" cy="7200000"/>
           </a:xfrm>
           <a:prstGeom prst="rect">
             <a:avLst/>
@@ -6213,11 +6213,11 @@
                 <a:spcPts val="0"/>
               </a:spcBef>
               <a:spcAft>
-                <a:spcPts val="320"/>
-              </a:spcAft>
-            </a:pPr>
-            <a:r>
-              <a:rPr sz="1350" b="0">
+                <a:spcPts val="300"/>
+              </a:spcAft>
+            </a:pPr>
+            <a:r>
+              <a:rPr sz="1250" b="0">
                 <a:solidFill>
                   <a:srgbClr val="4B5A6E"/>
                 </a:solidFill>
@@ -6235,11 +6235,11 @@
                 <a:spcPts val="0"/>
               </a:spcBef>
               <a:spcAft>
-                <a:spcPts val="320"/>
-              </a:spcAft>
-            </a:pPr>
-            <a:r>
-              <a:rPr sz="1350" b="0">
+                <a:spcPts val="300"/>
+              </a:spcAft>
+            </a:pPr>
+            <a:r>
+              <a:rPr sz="1250" b="0">
                 <a:solidFill>
                   <a:srgbClr val="4B5A6E"/>
                 </a:solidFill>
@@ -6261,7 +6261,7 @@
               </a:spcAft>
             </a:pPr>
             <a:r>
-              <a:rPr sz="1350" b="0">
+              <a:rPr sz="1250" b="0">
                 <a:solidFill>
                   <a:srgbClr val="4B5A6E"/>
                 </a:solidFill>
@@ -6280,8 +6280,8 @@
         </p:nvSpPr>
         <p:spPr>
           <a:xfrm>
-            <a:off x="10818000" y="12924000"/>
-            <a:ext cx="4617000" cy="2520000"/>
+            <a:off x="8870400" y="12924000"/>
+            <a:ext cx="3643200" cy="2520000"/>
           </a:xfrm>
           <a:prstGeom prst="roundRect">
             <a:avLst>
@@ -6328,8 +6328,8 @@
         </p:nvSpPr>
         <p:spPr>
           <a:xfrm>
-            <a:off x="10818000" y="12924000"/>
-            <a:ext cx="4617000" cy="828000"/>
+            <a:off x="8870400" y="12924000"/>
+            <a:ext cx="3643200" cy="828000"/>
           </a:xfrm>
           <a:prstGeom prst="rect">
             <a:avLst/>
@@ -6372,8 +6372,8 @@
         </p:nvSpPr>
         <p:spPr>
           <a:xfrm>
-            <a:off x="10818000" y="13752000"/>
-            <a:ext cx="4617000" cy="18000"/>
+            <a:off x="8870400" y="13752000"/>
+            <a:ext cx="3643200" cy="18000"/>
           </a:xfrm>
           <a:prstGeom prst="rect">
             <a:avLst/>
@@ -6416,7 +6416,7 @@
         </p:nvSpPr>
         <p:spPr>
           <a:xfrm>
-            <a:off x="11070000" y="13068000"/>
+            <a:off x="9122400" y="13068000"/>
             <a:ext cx="432000" cy="324000"/>
           </a:xfrm>
           <a:prstGeom prst="rect">
@@ -6458,8 +6458,8 @@
         </p:nvSpPr>
         <p:spPr>
           <a:xfrm>
-            <a:off x="11070000" y="13338000"/>
-            <a:ext cx="4113000" cy="396000"/>
+            <a:off x="9086400" y="13338000"/>
+            <a:ext cx="3211200" cy="396000"/>
           </a:xfrm>
           <a:prstGeom prst="rect">
             <a:avLst/>
@@ -6484,7 +6484,7 @@
               </a:spcAft>
             </a:pPr>
             <a:r>
-              <a:rPr sz="1600" b="1">
+              <a:rPr sz="1500" b="1">
                 <a:solidFill>
                   <a:srgbClr val="0F2A47"/>
                 </a:solidFill>
@@ -6503,8 +6503,8 @@
         </p:nvSpPr>
         <p:spPr>
           <a:xfrm>
-            <a:off x="11070000" y="13932000"/>
-            <a:ext cx="4149000" cy="7200000"/>
+            <a:off x="9086400" y="13932000"/>
+            <a:ext cx="3247200" cy="7200000"/>
           </a:xfrm>
           <a:prstGeom prst="rect">
             <a:avLst/>
@@ -6525,11 +6525,11 @@
                 <a:spcPts val="0"/>
               </a:spcBef>
               <a:spcAft>
-                <a:spcPts val="320"/>
-              </a:spcAft>
-            </a:pPr>
-            <a:r>
-              <a:rPr sz="1350" b="0">
+                <a:spcPts val="300"/>
+              </a:spcAft>
+            </a:pPr>
+            <a:r>
+              <a:rPr sz="1250" b="0">
                 <a:solidFill>
                   <a:srgbClr val="4B5A6E"/>
                 </a:solidFill>
@@ -6547,11 +6547,11 @@
                 <a:spcPts val="0"/>
               </a:spcBef>
               <a:spcAft>
-                <a:spcPts val="320"/>
-              </a:spcAft>
-            </a:pPr>
-            <a:r>
-              <a:rPr sz="1350" b="0">
+                <a:spcPts val="300"/>
+              </a:spcAft>
+            </a:pPr>
+            <a:r>
+              <a:rPr sz="1250" b="0">
                 <a:solidFill>
                   <a:srgbClr val="4B5A6E"/>
                 </a:solidFill>
@@ -6573,7 +6573,7 @@
               </a:spcAft>
             </a:pPr>
             <a:r>
-              <a:rPr sz="1350" b="0">
+              <a:rPr sz="1250" b="0">
                 <a:solidFill>
                   <a:srgbClr val="4B5A6E"/>
                 </a:solidFill>
@@ -6592,8 +6592,8 @@
         </p:nvSpPr>
         <p:spPr>
           <a:xfrm>
-            <a:off x="15687000" y="12924000"/>
-            <a:ext cx="4617000" cy="2520000"/>
+            <a:off x="12765600" y="12924000"/>
+            <a:ext cx="3643200" cy="2520000"/>
           </a:xfrm>
           <a:prstGeom prst="roundRect">
             <a:avLst>
@@ -6640,8 +6640,8 @@
         </p:nvSpPr>
         <p:spPr>
           <a:xfrm>
-            <a:off x="15687000" y="12924000"/>
-            <a:ext cx="4617000" cy="828000"/>
+            <a:off x="12765600" y="12924000"/>
+            <a:ext cx="3643200" cy="828000"/>
           </a:xfrm>
           <a:prstGeom prst="rect">
             <a:avLst/>
@@ -6684,8 +6684,8 @@
         </p:nvSpPr>
         <p:spPr>
           <a:xfrm>
-            <a:off x="15687000" y="13752000"/>
-            <a:ext cx="4617000" cy="18000"/>
+            <a:off x="12765600" y="13752000"/>
+            <a:ext cx="3643200" cy="18000"/>
           </a:xfrm>
           <a:prstGeom prst="rect">
             <a:avLst/>
@@ -6728,7 +6728,7 @@
         </p:nvSpPr>
         <p:spPr>
           <a:xfrm>
-            <a:off x="15939000" y="13068000"/>
+            <a:off x="13017600" y="13068000"/>
             <a:ext cx="432000" cy="324000"/>
           </a:xfrm>
           <a:prstGeom prst="rect">
@@ -6770,8 +6770,8 @@
         </p:nvSpPr>
         <p:spPr>
           <a:xfrm>
-            <a:off x="15939000" y="13338000"/>
-            <a:ext cx="4113000" cy="396000"/>
+            <a:off x="12981600" y="13338000"/>
+            <a:ext cx="3211200" cy="396000"/>
           </a:xfrm>
           <a:prstGeom prst="rect">
             <a:avLst/>
@@ -6796,13 +6796,13 @@
               </a:spcAft>
             </a:pPr>
             <a:r>
-              <a:rPr sz="1600" b="1">
+              <a:rPr sz="1500" b="1">
                 <a:solidFill>
                   <a:srgbClr val="0F2A47"/>
                 </a:solidFill>
                 <a:latin typeface="맑은 고딕"/>
               </a:rPr>
-              <a:t>사내망 전용 · 오프라인 배포</a:t>
+              <a:t>팀 현황 · 팀원 역량</a:t>
             </a:r>
           </a:p>
         </p:txBody>
@@ -6815,8 +6815,8 @@
         </p:nvSpPr>
         <p:spPr>
           <a:xfrm>
-            <a:off x="15939000" y="13932000"/>
-            <a:ext cx="4149000" cy="7200000"/>
+            <a:off x="12981600" y="13932000"/>
+            <a:ext cx="3247200" cy="7200000"/>
           </a:xfrm>
           <a:prstGeom prst="rect">
             <a:avLst/>
@@ -6837,17 +6837,17 @@
                 <a:spcPts val="0"/>
               </a:spcBef>
               <a:spcAft>
-                <a:spcPts val="320"/>
-              </a:spcAft>
-            </a:pPr>
-            <a:r>
-              <a:rPr sz="1350" b="0">
+                <a:spcPts val="300"/>
+              </a:spcAft>
+            </a:pPr>
+            <a:r>
+              <a:rPr sz="1250" b="0">
                 <a:solidFill>
                   <a:srgbClr val="4B5A6E"/>
                 </a:solidFill>
                 <a:latin typeface="맑은 고딕"/>
               </a:rPr>
-              <a:t>· 데이터가 내 PC 밖으로 나가지 않음 (외부 전송 없음)</a:t>
+              <a:t>· 홈에서 연도별 팀 현황 · 팀원별 수행 현황을 한 화면에</a:t>
             </a:r>
           </a:p>
           <a:p>
@@ -6859,17 +6859,17 @@
                 <a:spcPts val="0"/>
               </a:spcBef>
               <a:spcAft>
-                <a:spcPts val="320"/>
-              </a:spcAft>
-            </a:pPr>
-            <a:r>
-              <a:rPr sz="1350" b="0">
+                <a:spcPts val="300"/>
+              </a:spcAft>
+            </a:pPr>
+            <a:r>
+              <a:rPr sz="1250" b="0">
                 <a:solidFill>
                   <a:srgbClr val="4B5A6E"/>
                 </a:solidFill>
                 <a:latin typeface="맑은 고딕"/>
               </a:rPr>
-              <a:t>· 인터넷 차단 PC 에서 ZIP 하나로 설치</a:t>
+              <a:t>· 교육·세미나 이력을 사람 기준으로 — 면담 자료</a:t>
             </a:r>
           </a:p>
           <a:p>
@@ -6885,20 +6885,332 @@
               </a:spcAft>
             </a:pPr>
             <a:r>
-              <a:rPr sz="1350" b="0">
+              <a:rPr sz="1250" b="0">
                 <a:solidFill>
                   <a:srgbClr val="4B5A6E"/>
                 </a:solidFill>
                 <a:latin typeface="맑은 고딕"/>
               </a:rPr>
-              <a:t>· 자동 백업 · 버전 보관 · 휴지통</a:t>
+              <a:t>· 과제 × 월 보고 표로 한 해 보고 이력 확인</a:t>
+            </a:r>
+          </a:p>
+        </p:txBody>
+      </p:sp>
+      <p:sp>
+        <p:nvSpPr>
+          <p:cNvPr id="81" name="Rounded Rectangle 80"/>
+          <p:cNvSpPr/>
+          <p:nvPr/>
+        </p:nvSpPr>
+        <p:spPr>
+          <a:xfrm>
+            <a:off x="16660800" y="12924000"/>
+            <a:ext cx="3643200" cy="2520000"/>
+          </a:xfrm>
+          <a:prstGeom prst="roundRect">
+            <a:avLst>
+              <a:gd name="adj" fmla="val 8000"/>
+            </a:avLst>
+          </a:prstGeom>
+          <a:solidFill>
+            <a:srgbClr val="FFFFFF"/>
+          </a:solidFill>
+          <a:ln w="12700">
+            <a:solidFill>
+              <a:srgbClr val="C9D4E0"/>
+            </a:solidFill>
+          </a:ln>
+          <a:effectLst/>
+        </p:spPr>
+        <p:style>
+          <a:lnRef idx="1">
+            <a:schemeClr val="accent1"/>
+          </a:lnRef>
+          <a:fillRef idx="3">
+            <a:schemeClr val="accent1"/>
+          </a:fillRef>
+          <a:effectRef idx="2">
+            <a:schemeClr val="accent1"/>
+          </a:effectRef>
+          <a:fontRef idx="minor">
+            <a:schemeClr val="lt1"/>
+          </a:fontRef>
+        </p:style>
+        <p:txBody>
+          <a:bodyPr rtlCol="0" anchor="ctr" wrap="square"/>
+          <a:lstStyle/>
+          <a:p>
+            <a:pPr algn="ctr"/>
+          </a:p>
+        </p:txBody>
+      </p:sp>
+      <p:sp>
+        <p:nvSpPr>
+          <p:cNvPr id="82" name="Rectangle 81"/>
+          <p:cNvSpPr/>
+          <p:nvPr/>
+        </p:nvSpPr>
+        <p:spPr>
+          <a:xfrm>
+            <a:off x="16660800" y="12924000"/>
+            <a:ext cx="3643200" cy="828000"/>
+          </a:xfrm>
+          <a:prstGeom prst="rect">
+            <a:avLst/>
+          </a:prstGeom>
+          <a:solidFill>
+            <a:srgbClr val="F7F9FB"/>
+          </a:solidFill>
+          <a:ln>
+            <a:noFill/>
+          </a:ln>
+          <a:effectLst/>
+        </p:spPr>
+        <p:style>
+          <a:lnRef idx="1">
+            <a:schemeClr val="accent1"/>
+          </a:lnRef>
+          <a:fillRef idx="3">
+            <a:schemeClr val="accent1"/>
+          </a:fillRef>
+          <a:effectRef idx="2">
+            <a:schemeClr val="accent1"/>
+          </a:effectRef>
+          <a:fontRef idx="minor">
+            <a:schemeClr val="lt1"/>
+          </a:fontRef>
+        </p:style>
+        <p:txBody>
+          <a:bodyPr rtlCol="0" anchor="ctr" wrap="square"/>
+          <a:lstStyle/>
+          <a:p>
+            <a:pPr algn="ctr"/>
+          </a:p>
+        </p:txBody>
+      </p:sp>
+      <p:sp>
+        <p:nvSpPr>
+          <p:cNvPr id="83" name="Rectangle 82"/>
+          <p:cNvSpPr/>
+          <p:nvPr/>
+        </p:nvSpPr>
+        <p:spPr>
+          <a:xfrm>
+            <a:off x="16660800" y="13752000"/>
+            <a:ext cx="3643200" cy="18000"/>
+          </a:xfrm>
+          <a:prstGeom prst="rect">
+            <a:avLst/>
+          </a:prstGeom>
+          <a:solidFill>
+            <a:srgbClr val="C9D4E0"/>
+          </a:solidFill>
+          <a:ln>
+            <a:noFill/>
+          </a:ln>
+          <a:effectLst/>
+        </p:spPr>
+        <p:style>
+          <a:lnRef idx="1">
+            <a:schemeClr val="accent1"/>
+          </a:lnRef>
+          <a:fillRef idx="3">
+            <a:schemeClr val="accent1"/>
+          </a:fillRef>
+          <a:effectRef idx="2">
+            <a:schemeClr val="accent1"/>
+          </a:effectRef>
+          <a:fontRef idx="minor">
+            <a:schemeClr val="lt1"/>
+          </a:fontRef>
+        </p:style>
+        <p:txBody>
+          <a:bodyPr rtlCol="0" anchor="ctr" wrap="square"/>
+          <a:lstStyle/>
+          <a:p>
+            <a:pPr algn="ctr"/>
+          </a:p>
+        </p:txBody>
+      </p:sp>
+      <p:sp>
+        <p:nvSpPr>
+          <p:cNvPr id="84" name="TextBox 83"/>
+          <p:cNvSpPr txBox="1"/>
+          <p:nvPr/>
+        </p:nvSpPr>
+        <p:spPr>
+          <a:xfrm>
+            <a:off x="16912800" y="13068000"/>
+            <a:ext cx="432000" cy="324000"/>
+          </a:xfrm>
+          <a:prstGeom prst="rect">
+            <a:avLst/>
+          </a:prstGeom>
+          <a:noFill/>
+        </p:spPr>
+        <p:txBody>
+          <a:bodyPr wrap="square" anchor="t" lIns="0" rIns="0" tIns="0" bIns="0">
+            <a:spAutoFit/>
+          </a:bodyPr>
+          <a:lstStyle/>
+          <a:p>
+            <a:pPr algn="l">
+              <a:spcBef>
+                <a:spcPts val="0"/>
+              </a:spcBef>
+              <a:spcAft>
+                <a:spcPts val="0"/>
+              </a:spcAft>
+            </a:pPr>
+            <a:r>
+              <a:rPr sz="1700" b="1">
+                <a:solidFill>
+                  <a:srgbClr val="1F6FEB"/>
+                </a:solidFill>
+                <a:latin typeface="맑은 고딕"/>
+              </a:rPr>
+              <a:t>⑤</a:t>
+            </a:r>
+          </a:p>
+        </p:txBody>
+      </p:sp>
+      <p:sp>
+        <p:nvSpPr>
+          <p:cNvPr id="85" name="TextBox 84"/>
+          <p:cNvSpPr txBox="1"/>
+          <p:nvPr/>
+        </p:nvSpPr>
+        <p:spPr>
+          <a:xfrm>
+            <a:off x="16876800" y="13338000"/>
+            <a:ext cx="3211200" cy="396000"/>
+          </a:xfrm>
+          <a:prstGeom prst="rect">
+            <a:avLst/>
+          </a:prstGeom>
+          <a:noFill/>
+        </p:spPr>
+        <p:txBody>
+          <a:bodyPr wrap="square" anchor="t" lIns="0" rIns="0" tIns="0" bIns="0">
+            <a:spAutoFit/>
+          </a:bodyPr>
+          <a:lstStyle/>
+          <a:p>
+            <a:pPr algn="l">
+              <a:lnSpc>
+                <a:spcPct val="110000"/>
+              </a:lnSpc>
+              <a:spcBef>
+                <a:spcPts val="0"/>
+              </a:spcBef>
+              <a:spcAft>
+                <a:spcPts val="0"/>
+              </a:spcAft>
+            </a:pPr>
+            <a:r>
+              <a:rPr sz="1500" b="1">
+                <a:solidFill>
+                  <a:srgbClr val="0F2A47"/>
+                </a:solidFill>
+                <a:latin typeface="맑은 고딕"/>
+              </a:rPr>
+              <a:t>사내망 전용 · 오프라인 배포</a:t>
+            </a:r>
+          </a:p>
+        </p:txBody>
+      </p:sp>
+      <p:sp>
+        <p:nvSpPr>
+          <p:cNvPr id="86" name="TextBox 85"/>
+          <p:cNvSpPr txBox="1"/>
+          <p:nvPr/>
+        </p:nvSpPr>
+        <p:spPr>
+          <a:xfrm>
+            <a:off x="16876800" y="13932000"/>
+            <a:ext cx="3247200" cy="7200000"/>
+          </a:xfrm>
+          <a:prstGeom prst="rect">
+            <a:avLst/>
+          </a:prstGeom>
+          <a:noFill/>
+        </p:spPr>
+        <p:txBody>
+          <a:bodyPr wrap="square" anchor="t" lIns="0" rIns="0" tIns="0" bIns="0">
+            <a:spAutoFit/>
+          </a:bodyPr>
+          <a:lstStyle/>
+          <a:p>
+            <a:pPr algn="l">
+              <a:lnSpc>
+                <a:spcPct val="118000"/>
+              </a:lnSpc>
+              <a:spcBef>
+                <a:spcPts val="0"/>
+              </a:spcBef>
+              <a:spcAft>
+                <a:spcPts val="300"/>
+              </a:spcAft>
+            </a:pPr>
+            <a:r>
+              <a:rPr sz="1250" b="0">
+                <a:solidFill>
+                  <a:srgbClr val="4B5A6E"/>
+                </a:solidFill>
+                <a:latin typeface="맑은 고딕"/>
+              </a:rPr>
+              <a:t>· 데이터가 내 PC 밖으로 나가지 않음 (외부 전송 없음)</a:t>
+            </a:r>
+          </a:p>
+          <a:p>
+            <a:pPr algn="l">
+              <a:lnSpc>
+                <a:spcPct val="118000"/>
+              </a:lnSpc>
+              <a:spcBef>
+                <a:spcPts val="0"/>
+              </a:spcBef>
+              <a:spcAft>
+                <a:spcPts val="300"/>
+              </a:spcAft>
+            </a:pPr>
+            <a:r>
+              <a:rPr sz="1250" b="0">
+                <a:solidFill>
+                  <a:srgbClr val="4B5A6E"/>
+                </a:solidFill>
+                <a:latin typeface="맑은 고딕"/>
+              </a:rPr>
+              <a:t>· AI 요약도 호출 없이 프롬프트만 복사</a:t>
+            </a:r>
+          </a:p>
+          <a:p>
+            <a:pPr algn="l">
+              <a:lnSpc>
+                <a:spcPct val="118000"/>
+              </a:lnSpc>
+              <a:spcBef>
+                <a:spcPts val="0"/>
+              </a:spcBef>
+              <a:spcAft>
+                <a:spcPts val="0"/>
+              </a:spcAft>
+            </a:pPr>
+            <a:r>
+              <a:rPr sz="1250" b="0">
+                <a:solidFill>
+                  <a:srgbClr val="4B5A6E"/>
+                </a:solidFill>
+                <a:latin typeface="맑은 고딕"/>
+              </a:rPr>
+              <a:t>· 인터넷 차단 PC 에서 ZIP 하나로 설치 · 백업 · 버전 보관</a:t>
             </a:r>
           </a:p>
         </p:txBody>
       </p:sp>
       <p:pic>
         <p:nvPicPr>
-          <p:cNvPr id="81" name="Picture 80" descr="screen-list.png"/>
+          <p:cNvPr id="87" name="Picture 86" descr="screen-home.png"/>
           <p:cNvPicPr>
             <a:picLocks noChangeAspect="1"/>
           </p:cNvPicPr>
@@ -6912,8 +7224,8 @@
         </p:blipFill>
         <p:spPr>
           <a:xfrm>
-            <a:off x="1908000" y="15696000"/>
-            <a:ext cx="5688000" cy="2844000"/>
+            <a:off x="1080000" y="15732000"/>
+            <a:ext cx="4644000" cy="2322000"/>
           </a:xfrm>
           <a:prstGeom prst="rect">
             <a:avLst/>
@@ -6922,14 +7234,14 @@
       </p:pic>
       <p:sp>
         <p:nvSpPr>
-          <p:cNvPr id="82" name="Rectangle 81"/>
+          <p:cNvPr id="88" name="Rectangle 87"/>
           <p:cNvSpPr/>
           <p:nvPr/>
         </p:nvSpPr>
         <p:spPr>
           <a:xfrm>
-            <a:off x="1908000" y="15696000"/>
-            <a:ext cx="5688000" cy="2844000"/>
+            <a:off x="1080000" y="15732000"/>
+            <a:ext cx="4644000" cy="2322000"/>
           </a:xfrm>
           <a:prstGeom prst="rect">
             <a:avLst/>
@@ -6966,14 +7278,14 @@
       </p:sp>
       <p:sp>
         <p:nvSpPr>
-          <p:cNvPr id="83" name="TextBox 82"/>
+          <p:cNvPr id="89" name="TextBox 88"/>
           <p:cNvSpPr txBox="1"/>
           <p:nvPr/>
         </p:nvSpPr>
         <p:spPr>
           <a:xfrm>
-            <a:off x="1908000" y="18619200"/>
-            <a:ext cx="5688000" cy="288000"/>
+            <a:off x="1080000" y="18133200"/>
+            <a:ext cx="4644000" cy="288000"/>
           </a:xfrm>
           <a:prstGeom prst="rect">
             <a:avLst/>
@@ -6987,28 +7299,31 @@
           <a:lstStyle/>
           <a:p>
             <a:pPr algn="ctr">
-              <a:spcBef>
-                <a:spcPts val="0"/>
-              </a:spcBef>
-              <a:spcAft>
-                <a:spcPts val="0"/>
-              </a:spcAft>
-            </a:pPr>
-            <a:r>
-              <a:rPr sz="1150" b="0">
+              <a:lnSpc>
+                <a:spcPct val="110000"/>
+              </a:lnSpc>
+              <a:spcBef>
+                <a:spcPts val="0"/>
+              </a:spcBef>
+              <a:spcAft>
+                <a:spcPts val="0"/>
+              </a:spcAft>
+            </a:pPr>
+            <a:r>
+              <a:rPr sz="1100" b="0">
                 <a:solidFill>
                   <a:srgbClr val="7A8899"/>
                 </a:solidFill>
                 <a:latin typeface="맑은 고딕"/>
               </a:rPr>
-              <a:t>과제 목록 — 상태 · 담당자 · 마감 · 효과 · 미보고를 한 화면에</a:t>
+              <a:t>홈 — 그 해 팀 현황과 팀원별 수행·효과를 한 화면에</a:t>
             </a:r>
           </a:p>
         </p:txBody>
       </p:sp>
       <p:pic>
         <p:nvPicPr>
-          <p:cNvPr id="84" name="Picture 83" descr="screen-reports.png"/>
+          <p:cNvPr id="90" name="Picture 89" descr="screen-list.png"/>
           <p:cNvPicPr>
             <a:picLocks noChangeAspect="1"/>
           </p:cNvPicPr>
@@ -7022,8 +7337,8 @@
         </p:blipFill>
         <p:spPr>
           <a:xfrm>
-            <a:off x="7848000" y="15696000"/>
-            <a:ext cx="5688000" cy="2844000"/>
+            <a:off x="5940000" y="15732000"/>
+            <a:ext cx="4644000" cy="2322000"/>
           </a:xfrm>
           <a:prstGeom prst="rect">
             <a:avLst/>
@@ -7032,14 +7347,14 @@
       </p:pic>
       <p:sp>
         <p:nvSpPr>
-          <p:cNvPr id="85" name="Rectangle 84"/>
+          <p:cNvPr id="91" name="Rectangle 90"/>
           <p:cNvSpPr/>
           <p:nvPr/>
         </p:nvSpPr>
         <p:spPr>
           <a:xfrm>
-            <a:off x="7848000" y="15696000"/>
-            <a:ext cx="5688000" cy="2844000"/>
+            <a:off x="5940000" y="15732000"/>
+            <a:ext cx="4644000" cy="2322000"/>
           </a:xfrm>
           <a:prstGeom prst="rect">
             <a:avLst/>
@@ -7076,14 +7391,14 @@
       </p:sp>
       <p:sp>
         <p:nvSpPr>
-          <p:cNvPr id="86" name="TextBox 85"/>
+          <p:cNvPr id="92" name="TextBox 91"/>
           <p:cNvSpPr txBox="1"/>
           <p:nvPr/>
         </p:nvSpPr>
         <p:spPr>
           <a:xfrm>
-            <a:off x="7848000" y="18619200"/>
-            <a:ext cx="5688000" cy="288000"/>
+            <a:off x="5940000" y="18133200"/>
+            <a:ext cx="4644000" cy="288000"/>
           </a:xfrm>
           <a:prstGeom prst="rect">
             <a:avLst/>
@@ -7097,28 +7412,31 @@
           <a:lstStyle/>
           <a:p>
             <a:pPr algn="ctr">
-              <a:spcBef>
-                <a:spcPts val="0"/>
-              </a:spcBef>
-              <a:spcAft>
-                <a:spcPts val="0"/>
-              </a:spcAft>
-            </a:pPr>
-            <a:r>
-              <a:rPr sz="1150" b="0">
+              <a:lnSpc>
+                <a:spcPct val="110000"/>
+              </a:lnSpc>
+              <a:spcBef>
+                <a:spcPts val="0"/>
+              </a:spcBef>
+              <a:spcAft>
+                <a:spcPts val="0"/>
+              </a:spcAft>
+            </a:pPr>
+            <a:r>
+              <a:rPr sz="1100" b="0">
                 <a:solidFill>
                   <a:srgbClr val="7A8899"/>
                 </a:solidFill>
                 <a:latin typeface="맑은 고딕"/>
               </a:rPr>
-              <a:t>보고 대상 후보 — 미보고 경과일 순으로 자동 추천</a:t>
+              <a:t>과제 목록 — 상태 · 담당자 · 마감 · 효과 · 미보고</a:t>
             </a:r>
           </a:p>
         </p:txBody>
       </p:sp>
       <p:pic>
         <p:nvPicPr>
-          <p:cNvPr id="87" name="Picture 86" descr="screen-detail.png"/>
+          <p:cNvPr id="93" name="Picture 92" descr="screen-reports.png"/>
           <p:cNvPicPr>
             <a:picLocks noChangeAspect="1"/>
           </p:cNvPicPr>
@@ -7132,8 +7450,8 @@
         </p:blipFill>
         <p:spPr>
           <a:xfrm>
-            <a:off x="13788000" y="15696000"/>
-            <a:ext cx="5688000" cy="2844000"/>
+            <a:off x="10800000" y="15732000"/>
+            <a:ext cx="4644000" cy="2322000"/>
           </a:xfrm>
           <a:prstGeom prst="rect">
             <a:avLst/>
@@ -7142,14 +7460,14 @@
       </p:pic>
       <p:sp>
         <p:nvSpPr>
-          <p:cNvPr id="88" name="Rectangle 87"/>
+          <p:cNvPr id="94" name="Rectangle 93"/>
           <p:cNvSpPr/>
           <p:nvPr/>
         </p:nvSpPr>
         <p:spPr>
           <a:xfrm>
-            <a:off x="13788000" y="15696000"/>
-            <a:ext cx="5688000" cy="2844000"/>
+            <a:off x="10800000" y="15732000"/>
+            <a:ext cx="4644000" cy="2322000"/>
           </a:xfrm>
           <a:prstGeom prst="rect">
             <a:avLst/>
@@ -7186,14 +7504,14 @@
       </p:sp>
       <p:sp>
         <p:nvSpPr>
-          <p:cNvPr id="89" name="TextBox 88"/>
+          <p:cNvPr id="95" name="TextBox 94"/>
           <p:cNvSpPr txBox="1"/>
           <p:nvPr/>
         </p:nvSpPr>
         <p:spPr>
           <a:xfrm>
-            <a:off x="13788000" y="18619200"/>
-            <a:ext cx="5688000" cy="288000"/>
+            <a:off x="10800000" y="18133200"/>
+            <a:ext cx="4644000" cy="288000"/>
           </a:xfrm>
           <a:prstGeom prst="rect">
             <a:avLst/>
@@ -7207,34 +7525,150 @@
           <a:lstStyle/>
           <a:p>
             <a:pPr algn="ctr">
-              <a:spcBef>
-                <a:spcPts val="0"/>
-              </a:spcBef>
-              <a:spcAft>
-                <a:spcPts val="0"/>
-              </a:spcAft>
-            </a:pPr>
-            <a:r>
-              <a:rPr sz="1150" b="0">
+              <a:lnSpc>
+                <a:spcPct val="110000"/>
+              </a:lnSpc>
+              <a:spcBef>
+                <a:spcPts val="0"/>
+              </a:spcBef>
+              <a:spcAft>
+                <a:spcPts val="0"/>
+              </a:spcAft>
+            </a:pPr>
+            <a:r>
+              <a:rPr sz="1100" b="0">
                 <a:solidFill>
                   <a:srgbClr val="7A8899"/>
                 </a:solidFill>
                 <a:latin typeface="맑은 고딕"/>
               </a:rPr>
-              <a:t>과제 상세 — 개요와 진행이력, 지난 보고 지점 표시</a:t>
-            </a:r>
-          </a:p>
-        </p:txBody>
-      </p:sp>
-      <p:sp>
-        <p:nvSpPr>
-          <p:cNvPr id="90" name="Rounded Rectangle 89"/>
+              <a:t>보고 대상 후보 — 미보고 경과일 순으로 자동 추천</a:t>
+            </a:r>
+          </a:p>
+        </p:txBody>
+      </p:sp>
+      <p:pic>
+        <p:nvPicPr>
+          <p:cNvPr id="96" name="Picture 95" descr="screen-skills.png"/>
+          <p:cNvPicPr>
+            <a:picLocks noChangeAspect="1"/>
+          </p:cNvPicPr>
+          <p:nvPr/>
+        </p:nvPicPr>
+        <p:blipFill>
+          <a:blip r:embed="rId5"/>
+          <a:stretch>
+            <a:fillRect/>
+          </a:stretch>
+        </p:blipFill>
+        <p:spPr>
+          <a:xfrm>
+            <a:off x="15660000" y="15732000"/>
+            <a:ext cx="4644000" cy="2322000"/>
+          </a:xfrm>
+          <a:prstGeom prst="rect">
+            <a:avLst/>
+          </a:prstGeom>
+        </p:spPr>
+      </p:pic>
+      <p:sp>
+        <p:nvSpPr>
+          <p:cNvPr id="97" name="Rectangle 96"/>
           <p:cNvSpPr/>
           <p:nvPr/>
         </p:nvSpPr>
         <p:spPr>
           <a:xfrm>
-            <a:off x="1080000" y="19044000"/>
+            <a:off x="15660000" y="15732000"/>
+            <a:ext cx="4644000" cy="2322000"/>
+          </a:xfrm>
+          <a:prstGeom prst="rect">
+            <a:avLst/>
+          </a:prstGeom>
+          <a:noFill/>
+          <a:ln w="12700">
+            <a:solidFill>
+              <a:srgbClr val="C9D4E0"/>
+            </a:solidFill>
+          </a:ln>
+          <a:effectLst/>
+        </p:spPr>
+        <p:style>
+          <a:lnRef idx="1">
+            <a:schemeClr val="accent1"/>
+          </a:lnRef>
+          <a:fillRef idx="3">
+            <a:schemeClr val="accent1"/>
+          </a:fillRef>
+          <a:effectRef idx="2">
+            <a:schemeClr val="accent1"/>
+          </a:effectRef>
+          <a:fontRef idx="minor">
+            <a:schemeClr val="lt1"/>
+          </a:fontRef>
+        </p:style>
+        <p:txBody>
+          <a:bodyPr rtlCol="0" anchor="ctr" wrap="square"/>
+          <a:lstStyle/>
+          <a:p>
+            <a:pPr algn="ctr"/>
+          </a:p>
+        </p:txBody>
+      </p:sp>
+      <p:sp>
+        <p:nvSpPr>
+          <p:cNvPr id="98" name="TextBox 97"/>
+          <p:cNvSpPr txBox="1"/>
+          <p:nvPr/>
+        </p:nvSpPr>
+        <p:spPr>
+          <a:xfrm>
+            <a:off x="15660000" y="18133200"/>
+            <a:ext cx="4644000" cy="288000"/>
+          </a:xfrm>
+          <a:prstGeom prst="rect">
+            <a:avLst/>
+          </a:prstGeom>
+          <a:noFill/>
+        </p:spPr>
+        <p:txBody>
+          <a:bodyPr wrap="square" anchor="t" lIns="0" rIns="0" tIns="0" bIns="0">
+            <a:spAutoFit/>
+          </a:bodyPr>
+          <a:lstStyle/>
+          <a:p>
+            <a:pPr algn="ctr">
+              <a:lnSpc>
+                <a:spcPct val="110000"/>
+              </a:lnSpc>
+              <a:spcBef>
+                <a:spcPts val="0"/>
+              </a:spcBef>
+              <a:spcAft>
+                <a:spcPts val="0"/>
+              </a:spcAft>
+            </a:pPr>
+            <a:r>
+              <a:rPr sz="1100" b="0">
+                <a:solidFill>
+                  <a:srgbClr val="7A8899"/>
+                </a:solidFill>
+                <a:latin typeface="맑은 고딕"/>
+              </a:rPr>
+              <a:t>팀원 역량 — 교육·세미나 이력을 사람 기준으로</a:t>
+            </a:r>
+          </a:p>
+        </p:txBody>
+      </p:sp>
+      <p:sp>
+        <p:nvSpPr>
+          <p:cNvPr id="99" name="Rounded Rectangle 98"/>
+          <p:cNvSpPr/>
+          <p:nvPr/>
+        </p:nvSpPr>
+        <p:spPr>
+          <a:xfrm>
+            <a:off x="1080000" y="18630000"/>
             <a:ext cx="19224000" cy="900000"/>
           </a:xfrm>
           <a:prstGeom prst="roundRect">
@@ -7274,13 +7708,13 @@
       </p:sp>
       <p:sp>
         <p:nvSpPr>
-          <p:cNvPr id="91" name="TextBox 90"/>
+          <p:cNvPr id="100" name="TextBox 99"/>
           <p:cNvSpPr txBox="1"/>
           <p:nvPr/>
         </p:nvSpPr>
         <p:spPr>
           <a:xfrm>
-            <a:off x="1080000" y="19188000"/>
+            <a:off x="1080000" y="18774000"/>
             <a:ext cx="2746285" cy="288000"/>
           </a:xfrm>
           <a:prstGeom prst="rect">
@@ -7316,13 +7750,13 @@
       </p:sp>
       <p:sp>
         <p:nvSpPr>
-          <p:cNvPr id="92" name="TextBox 91"/>
+          <p:cNvPr id="101" name="TextBox 100"/>
           <p:cNvSpPr txBox="1"/>
           <p:nvPr/>
         </p:nvSpPr>
         <p:spPr>
           <a:xfrm>
-            <a:off x="1080000" y="19458000"/>
+            <a:off x="1080000" y="19044000"/>
             <a:ext cx="2746285" cy="396000"/>
           </a:xfrm>
           <a:prstGeom prst="rect">
@@ -7351,20 +7785,20 @@
                 </a:solidFill>
                 <a:latin typeface="맑은 고딕"/>
               </a:rPr>
-              <a:t>12,876줄</a:t>
-            </a:r>
-          </a:p>
-        </p:txBody>
-      </p:sp>
-      <p:sp>
-        <p:nvSpPr>
-          <p:cNvPr id="93" name="Rectangle 92"/>
+              <a:t>15,758줄</a:t>
+            </a:r>
+          </a:p>
+        </p:txBody>
+      </p:sp>
+      <p:sp>
+        <p:nvSpPr>
+          <p:cNvPr id="102" name="Rectangle 101"/>
           <p:cNvSpPr/>
           <p:nvPr/>
         </p:nvSpPr>
         <p:spPr>
           <a:xfrm>
-            <a:off x="3826285" y="19260000"/>
+            <a:off x="3826285" y="18846000"/>
             <a:ext cx="14400" cy="468000"/>
           </a:xfrm>
           <a:prstGeom prst="rect">
@@ -7402,13 +7836,13 @@
       </p:sp>
       <p:sp>
         <p:nvSpPr>
-          <p:cNvPr id="94" name="TextBox 93"/>
+          <p:cNvPr id="103" name="TextBox 102"/>
           <p:cNvSpPr txBox="1"/>
           <p:nvPr/>
         </p:nvSpPr>
         <p:spPr>
           <a:xfrm>
-            <a:off x="3826285" y="19188000"/>
+            <a:off x="3826285" y="18774000"/>
             <a:ext cx="2746285" cy="288000"/>
           </a:xfrm>
           <a:prstGeom prst="rect">
@@ -7444,13 +7878,13 @@
       </p:sp>
       <p:sp>
         <p:nvSpPr>
-          <p:cNvPr id="95" name="TextBox 94"/>
+          <p:cNvPr id="104" name="TextBox 103"/>
           <p:cNvSpPr txBox="1"/>
           <p:nvPr/>
         </p:nvSpPr>
         <p:spPr>
           <a:xfrm>
-            <a:off x="3826285" y="19458000"/>
+            <a:off x="3826285" y="19044000"/>
             <a:ext cx="2746285" cy="396000"/>
           </a:xfrm>
           <a:prstGeom prst="rect">
@@ -7479,20 +7913,20 @@
                 </a:solidFill>
                 <a:latin typeface="맑은 고딕"/>
               </a:rPr>
-              <a:t>56개</a:t>
-            </a:r>
-          </a:p>
-        </p:txBody>
-      </p:sp>
-      <p:sp>
-        <p:nvSpPr>
-          <p:cNvPr id="96" name="Rectangle 95"/>
+              <a:t>64개</a:t>
+            </a:r>
+          </a:p>
+        </p:txBody>
+      </p:sp>
+      <p:sp>
+        <p:nvSpPr>
+          <p:cNvPr id="105" name="Rectangle 104"/>
           <p:cNvSpPr/>
           <p:nvPr/>
         </p:nvSpPr>
         <p:spPr>
           <a:xfrm>
-            <a:off x="6572571" y="19260000"/>
+            <a:off x="6572571" y="18846000"/>
             <a:ext cx="14400" cy="468000"/>
           </a:xfrm>
           <a:prstGeom prst="rect">
@@ -7530,13 +7964,13 @@
       </p:sp>
       <p:sp>
         <p:nvSpPr>
-          <p:cNvPr id="97" name="TextBox 96"/>
+          <p:cNvPr id="106" name="TextBox 105"/>
           <p:cNvSpPr txBox="1"/>
           <p:nvPr/>
         </p:nvSpPr>
         <p:spPr>
           <a:xfrm>
-            <a:off x="6572571" y="19188000"/>
+            <a:off x="6572571" y="18774000"/>
             <a:ext cx="2746285" cy="288000"/>
           </a:xfrm>
           <a:prstGeom prst="rect">
@@ -7572,13 +8006,13 @@
       </p:sp>
       <p:sp>
         <p:nvSpPr>
-          <p:cNvPr id="98" name="TextBox 97"/>
+          <p:cNvPr id="107" name="TextBox 106"/>
           <p:cNvSpPr txBox="1"/>
           <p:nvPr/>
         </p:nvSpPr>
         <p:spPr>
           <a:xfrm>
-            <a:off x="6572571" y="19458000"/>
+            <a:off x="6572571" y="19044000"/>
             <a:ext cx="2746285" cy="396000"/>
           </a:xfrm>
           <a:prstGeom prst="rect">
@@ -7607,20 +8041,20 @@
                 </a:solidFill>
                 <a:latin typeface="맑은 고딕"/>
               </a:rPr>
-              <a:t>382건</a:t>
-            </a:r>
-          </a:p>
-        </p:txBody>
-      </p:sp>
-      <p:sp>
-        <p:nvSpPr>
-          <p:cNvPr id="99" name="Rectangle 98"/>
+              <a:t>457건</a:t>
+            </a:r>
+          </a:p>
+        </p:txBody>
+      </p:sp>
+      <p:sp>
+        <p:nvSpPr>
+          <p:cNvPr id="108" name="Rectangle 107"/>
           <p:cNvSpPr/>
           <p:nvPr/>
         </p:nvSpPr>
         <p:spPr>
           <a:xfrm>
-            <a:off x="9318857" y="19260000"/>
+            <a:off x="9318857" y="18846000"/>
             <a:ext cx="14400" cy="468000"/>
           </a:xfrm>
           <a:prstGeom prst="rect">
@@ -7658,13 +8092,13 @@
       </p:sp>
       <p:sp>
         <p:nvSpPr>
-          <p:cNvPr id="100" name="TextBox 99"/>
+          <p:cNvPr id="109" name="TextBox 108"/>
           <p:cNvSpPr txBox="1"/>
           <p:nvPr/>
         </p:nvSpPr>
         <p:spPr>
           <a:xfrm>
-            <a:off x="9318857" y="19188000"/>
+            <a:off x="9318857" y="18774000"/>
             <a:ext cx="2746285" cy="288000"/>
           </a:xfrm>
           <a:prstGeom prst="rect">
@@ -7700,13 +8134,13 @@
       </p:sp>
       <p:sp>
         <p:nvSpPr>
-          <p:cNvPr id="101" name="TextBox 100"/>
+          <p:cNvPr id="110" name="TextBox 109"/>
           <p:cNvSpPr txBox="1"/>
           <p:nvPr/>
         </p:nvSpPr>
         <p:spPr>
           <a:xfrm>
-            <a:off x="9318857" y="19458000"/>
+            <a:off x="9318857" y="19044000"/>
             <a:ext cx="2746285" cy="396000"/>
           </a:xfrm>
           <a:prstGeom prst="rect">
@@ -7735,20 +8169,20 @@
                 </a:solidFill>
                 <a:latin typeface="맑은 고딕"/>
               </a:rPr>
-              <a:t>6개</a:t>
-            </a:r>
-          </a:p>
-        </p:txBody>
-      </p:sp>
-      <p:sp>
-        <p:nvSpPr>
-          <p:cNvPr id="102" name="Rectangle 101"/>
+              <a:t>8개</a:t>
+            </a:r>
+          </a:p>
+        </p:txBody>
+      </p:sp>
+      <p:sp>
+        <p:nvSpPr>
+          <p:cNvPr id="111" name="Rectangle 110"/>
           <p:cNvSpPr/>
           <p:nvPr/>
         </p:nvSpPr>
         <p:spPr>
           <a:xfrm>
-            <a:off x="12065142" y="19260000"/>
+            <a:off x="12065142" y="18846000"/>
             <a:ext cx="14400" cy="468000"/>
           </a:xfrm>
           <a:prstGeom prst="rect">
@@ -7786,13 +8220,13 @@
       </p:sp>
       <p:sp>
         <p:nvSpPr>
-          <p:cNvPr id="103" name="TextBox 102"/>
+          <p:cNvPr id="112" name="TextBox 111"/>
           <p:cNvSpPr txBox="1"/>
           <p:nvPr/>
         </p:nvSpPr>
         <p:spPr>
           <a:xfrm>
-            <a:off x="12065142" y="19188000"/>
+            <a:off x="12065142" y="18774000"/>
             <a:ext cx="2746285" cy="288000"/>
           </a:xfrm>
           <a:prstGeom prst="rect">
@@ -7828,13 +8262,13 @@
       </p:sp>
       <p:sp>
         <p:nvSpPr>
-          <p:cNvPr id="104" name="TextBox 103"/>
+          <p:cNvPr id="113" name="TextBox 112"/>
           <p:cNvSpPr txBox="1"/>
           <p:nvPr/>
         </p:nvSpPr>
         <p:spPr>
           <a:xfrm>
-            <a:off x="12065142" y="19458000"/>
+            <a:off x="12065142" y="19044000"/>
             <a:ext cx="2746285" cy="396000"/>
           </a:xfrm>
           <a:prstGeom prst="rect">
@@ -7863,20 +8297,20 @@
                 </a:solidFill>
                 <a:latin typeface="맑은 고딕"/>
               </a:rPr>
-              <a:t>9개</a:t>
-            </a:r>
-          </a:p>
-        </p:txBody>
-      </p:sp>
-      <p:sp>
-        <p:nvSpPr>
-          <p:cNvPr id="105" name="Rectangle 104"/>
+              <a:t>10개</a:t>
+            </a:r>
+          </a:p>
+        </p:txBody>
+      </p:sp>
+      <p:sp>
+        <p:nvSpPr>
+          <p:cNvPr id="114" name="Rectangle 113"/>
           <p:cNvSpPr/>
           <p:nvPr/>
         </p:nvSpPr>
         <p:spPr>
           <a:xfrm>
-            <a:off x="14811428" y="19260000"/>
+            <a:off x="14811428" y="18846000"/>
             <a:ext cx="14400" cy="468000"/>
           </a:xfrm>
           <a:prstGeom prst="rect">
@@ -7914,13 +8348,13 @@
       </p:sp>
       <p:sp>
         <p:nvSpPr>
-          <p:cNvPr id="106" name="TextBox 105"/>
+          <p:cNvPr id="115" name="TextBox 114"/>
           <p:cNvSpPr txBox="1"/>
           <p:nvPr/>
         </p:nvSpPr>
         <p:spPr>
           <a:xfrm>
-            <a:off x="14811428" y="19188000"/>
+            <a:off x="14811428" y="18774000"/>
             <a:ext cx="2746285" cy="288000"/>
           </a:xfrm>
           <a:prstGeom prst="rect">
@@ -7956,13 +8390,13 @@
       </p:sp>
       <p:sp>
         <p:nvSpPr>
-          <p:cNvPr id="107" name="TextBox 106"/>
+          <p:cNvPr id="116" name="TextBox 115"/>
           <p:cNvSpPr txBox="1"/>
           <p:nvPr/>
         </p:nvSpPr>
         <p:spPr>
           <a:xfrm>
-            <a:off x="14811428" y="19458000"/>
+            <a:off x="14811428" y="19044000"/>
             <a:ext cx="2746285" cy="396000"/>
           </a:xfrm>
           <a:prstGeom prst="rect">
@@ -7991,20 +8425,20 @@
                 </a:solidFill>
                 <a:latin typeface="맑은 고딕"/>
               </a:rPr>
-              <a:t>319 FP</a:t>
-            </a:r>
-          </a:p>
-        </p:txBody>
-      </p:sp>
-      <p:sp>
-        <p:nvSpPr>
-          <p:cNvPr id="108" name="Rectangle 107"/>
+              <a:t>363 FP</a:t>
+            </a:r>
+          </a:p>
+        </p:txBody>
+      </p:sp>
+      <p:sp>
+        <p:nvSpPr>
+          <p:cNvPr id="117" name="Rectangle 116"/>
           <p:cNvSpPr/>
           <p:nvPr/>
         </p:nvSpPr>
         <p:spPr>
           <a:xfrm>
-            <a:off x="17557714" y="19260000"/>
+            <a:off x="17557714" y="18846000"/>
             <a:ext cx="14400" cy="468000"/>
           </a:xfrm>
           <a:prstGeom prst="rect">
@@ -8042,13 +8476,13 @@
       </p:sp>
       <p:sp>
         <p:nvSpPr>
-          <p:cNvPr id="109" name="TextBox 108"/>
+          <p:cNvPr id="118" name="TextBox 117"/>
           <p:cNvSpPr txBox="1"/>
           <p:nvPr/>
         </p:nvSpPr>
         <p:spPr>
           <a:xfrm>
-            <a:off x="17557714" y="19188000"/>
+            <a:off x="17557714" y="18774000"/>
             <a:ext cx="2746285" cy="288000"/>
           </a:xfrm>
           <a:prstGeom prst="rect">
@@ -8084,13 +8518,13 @@
       </p:sp>
       <p:sp>
         <p:nvSpPr>
-          <p:cNvPr id="110" name="TextBox 109"/>
+          <p:cNvPr id="119" name="TextBox 118"/>
           <p:cNvSpPr txBox="1"/>
           <p:nvPr/>
         </p:nvSpPr>
         <p:spPr>
           <a:xfrm>
-            <a:off x="17557714" y="19458000"/>
+            <a:off x="17557714" y="19044000"/>
             <a:ext cx="2746285" cy="396000"/>
           </a:xfrm>
           <a:prstGeom prst="rect">
@@ -8119,20 +8553,20 @@
                 </a:solidFill>
                 <a:latin typeface="맑은 고딕"/>
               </a:rPr>
-              <a:t>59건/69건</a:t>
-            </a:r>
-          </a:p>
-        </p:txBody>
-      </p:sp>
-      <p:sp>
-        <p:nvSpPr>
-          <p:cNvPr id="111" name="Rounded Rectangle 110"/>
+              <a:t>79건/80건</a:t>
+            </a:r>
+          </a:p>
+        </p:txBody>
+      </p:sp>
+      <p:sp>
+        <p:nvSpPr>
+          <p:cNvPr id="120" name="Rounded Rectangle 119"/>
           <p:cNvSpPr/>
           <p:nvPr/>
         </p:nvSpPr>
         <p:spPr>
           <a:xfrm>
-            <a:off x="1080000" y="20376000"/>
+            <a:off x="1080000" y="19998000"/>
             <a:ext cx="468000" cy="468000"/>
           </a:xfrm>
           <a:prstGeom prst="roundRect">
@@ -8172,13 +8606,13 @@
       </p:sp>
       <p:sp>
         <p:nvSpPr>
-          <p:cNvPr id="112" name="TextBox 111"/>
+          <p:cNvPr id="121" name="TextBox 120"/>
           <p:cNvSpPr txBox="1"/>
           <p:nvPr/>
         </p:nvSpPr>
         <p:spPr>
           <a:xfrm>
-            <a:off x="1080000" y="20458800"/>
+            <a:off x="1080000" y="20080800"/>
             <a:ext cx="468000" cy="468000"/>
           </a:xfrm>
           <a:prstGeom prst="rect">
@@ -8214,13 +8648,13 @@
       </p:sp>
       <p:sp>
         <p:nvSpPr>
-          <p:cNvPr id="113" name="TextBox 112"/>
+          <p:cNvPr id="122" name="TextBox 121"/>
           <p:cNvSpPr txBox="1"/>
           <p:nvPr/>
         </p:nvSpPr>
         <p:spPr>
           <a:xfrm>
-            <a:off x="1764000" y="20354400"/>
+            <a:off x="1764000" y="19976400"/>
             <a:ext cx="18540000" cy="612000"/>
           </a:xfrm>
           <a:prstGeom prst="rect">
@@ -8256,13 +8690,13 @@
       </p:sp>
       <p:sp>
         <p:nvSpPr>
-          <p:cNvPr id="114" name="TextBox 113"/>
+          <p:cNvPr id="123" name="TextBox 122"/>
           <p:cNvSpPr txBox="1"/>
           <p:nvPr/>
         </p:nvSpPr>
         <p:spPr>
           <a:xfrm>
-            <a:off x="1080000" y="20959200"/>
+            <a:off x="1080000" y="20581200"/>
             <a:ext cx="19224000" cy="288000"/>
           </a:xfrm>
           <a:prstGeom prst="rect">
@@ -8298,13 +8732,13 @@
       </p:sp>
       <p:sp>
         <p:nvSpPr>
-          <p:cNvPr id="115" name="Rounded Rectangle 114"/>
+          <p:cNvPr id="124" name="Rounded Rectangle 123"/>
           <p:cNvSpPr/>
           <p:nvPr/>
         </p:nvSpPr>
         <p:spPr>
           <a:xfrm>
-            <a:off x="1080000" y="21312000"/>
+            <a:off x="1080000" y="20934000"/>
             <a:ext cx="19224000" cy="3888000"/>
           </a:xfrm>
           <a:prstGeom prst="roundRect">
@@ -8346,13 +8780,13 @@
       </p:sp>
       <p:sp>
         <p:nvSpPr>
-          <p:cNvPr id="116" name="Rectangle 115"/>
+          <p:cNvPr id="125" name="Rectangle 124"/>
           <p:cNvSpPr/>
           <p:nvPr/>
         </p:nvSpPr>
         <p:spPr>
           <a:xfrm>
-            <a:off x="1512000" y="21672000"/>
+            <a:off x="1512000" y="21294000"/>
             <a:ext cx="8843040" cy="522000"/>
           </a:xfrm>
           <a:prstGeom prst="rect">
@@ -8390,13 +8824,13 @@
       </p:sp>
       <p:sp>
         <p:nvSpPr>
-          <p:cNvPr id="117" name="TextBox 116"/>
+          <p:cNvPr id="126" name="TextBox 125"/>
           <p:cNvSpPr txBox="1"/>
           <p:nvPr/>
         </p:nvSpPr>
         <p:spPr>
           <a:xfrm>
-            <a:off x="1692000" y="21823200"/>
+            <a:off x="1692000" y="21445200"/>
             <a:ext cx="2652912" cy="360000"/>
           </a:xfrm>
           <a:prstGeom prst="rect">
@@ -8432,13 +8866,13 @@
       </p:sp>
       <p:sp>
         <p:nvSpPr>
-          <p:cNvPr id="118" name="TextBox 117"/>
+          <p:cNvPr id="127" name="TextBox 126"/>
           <p:cNvSpPr txBox="1"/>
           <p:nvPr/>
         </p:nvSpPr>
         <p:spPr>
           <a:xfrm>
-            <a:off x="4164912" y="21823200"/>
+            <a:off x="4164912" y="21445200"/>
             <a:ext cx="3183494" cy="360000"/>
           </a:xfrm>
           <a:prstGeom prst="rect">
@@ -8474,13 +8908,13 @@
       </p:sp>
       <p:sp>
         <p:nvSpPr>
-          <p:cNvPr id="119" name="TextBox 118"/>
+          <p:cNvPr id="128" name="TextBox 127"/>
           <p:cNvSpPr txBox="1"/>
           <p:nvPr/>
         </p:nvSpPr>
         <p:spPr>
           <a:xfrm>
-            <a:off x="7348406" y="21816000"/>
+            <a:off x="7348406" y="21438000"/>
             <a:ext cx="3006633" cy="360000"/>
           </a:xfrm>
           <a:prstGeom prst="rect">
@@ -8516,13 +8950,13 @@
       </p:sp>
       <p:sp>
         <p:nvSpPr>
-          <p:cNvPr id="120" name="Rectangle 119"/>
+          <p:cNvPr id="129" name="Rectangle 128"/>
           <p:cNvSpPr/>
           <p:nvPr/>
         </p:nvSpPr>
         <p:spPr>
           <a:xfrm>
-            <a:off x="1512000" y="22701600"/>
+            <a:off x="1512000" y="22323600"/>
             <a:ext cx="8843040" cy="14400"/>
           </a:xfrm>
           <a:prstGeom prst="rect">
@@ -8560,13 +8994,13 @@
       </p:sp>
       <p:sp>
         <p:nvSpPr>
-          <p:cNvPr id="121" name="TextBox 120"/>
+          <p:cNvPr id="130" name="TextBox 129"/>
           <p:cNvSpPr txBox="1"/>
           <p:nvPr/>
         </p:nvSpPr>
         <p:spPr>
           <a:xfrm>
-            <a:off x="1692000" y="22345200"/>
+            <a:off x="1692000" y="21967200"/>
             <a:ext cx="2652912" cy="360000"/>
           </a:xfrm>
           <a:prstGeom prst="rect">
@@ -8602,13 +9036,13 @@
       </p:sp>
       <p:sp>
         <p:nvSpPr>
-          <p:cNvPr id="122" name="TextBox 121"/>
+          <p:cNvPr id="131" name="TextBox 130"/>
           <p:cNvSpPr txBox="1"/>
           <p:nvPr/>
         </p:nvSpPr>
         <p:spPr>
           <a:xfrm>
-            <a:off x="4164912" y="22345200"/>
+            <a:off x="4164912" y="21967200"/>
             <a:ext cx="3183494" cy="360000"/>
           </a:xfrm>
           <a:prstGeom prst="rect">
@@ -8637,20 +9071,20 @@
                 </a:solidFill>
                 <a:latin typeface="맑은 고딕"/>
               </a:rPr>
-              <a:t>16 M/M</a:t>
-            </a:r>
-          </a:p>
-        </p:txBody>
-      </p:sp>
-      <p:sp>
-        <p:nvSpPr>
-          <p:cNvPr id="123" name="TextBox 122"/>
+              <a:t>19 M/M</a:t>
+            </a:r>
+          </a:p>
+        </p:txBody>
+      </p:sp>
+      <p:sp>
+        <p:nvSpPr>
+          <p:cNvPr id="132" name="TextBox 131"/>
           <p:cNvSpPr txBox="1"/>
           <p:nvPr/>
         </p:nvSpPr>
         <p:spPr>
           <a:xfrm>
-            <a:off x="7348406" y="22338000"/>
+            <a:off x="7348406" y="21960000"/>
             <a:ext cx="3006633" cy="360000"/>
           </a:xfrm>
           <a:prstGeom prst="rect">
@@ -8679,20 +9113,20 @@
                 </a:solidFill>
                 <a:latin typeface="맑은 고딕"/>
               </a:rPr>
-              <a:t>0.19 M/M</a:t>
-            </a:r>
-          </a:p>
-        </p:txBody>
-      </p:sp>
-      <p:sp>
-        <p:nvSpPr>
-          <p:cNvPr id="124" name="Rectangle 123"/>
+              <a:t>0.23 M/M</a:t>
+            </a:r>
+          </a:p>
+        </p:txBody>
+      </p:sp>
+      <p:sp>
+        <p:nvSpPr>
+          <p:cNvPr id="133" name="Rectangle 132"/>
           <p:cNvSpPr/>
           <p:nvPr/>
         </p:nvSpPr>
         <p:spPr>
           <a:xfrm>
-            <a:off x="1512000" y="23223600"/>
+            <a:off x="1512000" y="22845600"/>
             <a:ext cx="8843040" cy="14400"/>
           </a:xfrm>
           <a:prstGeom prst="rect">
@@ -8730,13 +9164,13 @@
       </p:sp>
       <p:sp>
         <p:nvSpPr>
-          <p:cNvPr id="125" name="TextBox 124"/>
+          <p:cNvPr id="134" name="TextBox 133"/>
           <p:cNvSpPr txBox="1"/>
           <p:nvPr/>
         </p:nvSpPr>
         <p:spPr>
           <a:xfrm>
-            <a:off x="1692000" y="22867200"/>
+            <a:off x="1692000" y="22489200"/>
             <a:ext cx="2652912" cy="360000"/>
           </a:xfrm>
           <a:prstGeom prst="rect">
@@ -8772,13 +9206,13 @@
       </p:sp>
       <p:sp>
         <p:nvSpPr>
-          <p:cNvPr id="126" name="TextBox 125"/>
+          <p:cNvPr id="135" name="TextBox 134"/>
           <p:cNvSpPr txBox="1"/>
           <p:nvPr/>
         </p:nvSpPr>
         <p:spPr>
           <a:xfrm>
-            <a:off x="4164912" y="22867200"/>
+            <a:off x="4164912" y="22489200"/>
             <a:ext cx="3183494" cy="360000"/>
           </a:xfrm>
           <a:prstGeom prst="rect">
@@ -8807,20 +9241,20 @@
                 </a:solidFill>
                 <a:latin typeface="맑은 고딕"/>
               </a:rPr>
-              <a:t>4~5개월 · 3~4명</a:t>
-            </a:r>
-          </a:p>
-        </p:txBody>
-      </p:sp>
-      <p:sp>
-        <p:nvSpPr>
-          <p:cNvPr id="127" name="TextBox 126"/>
+              <a:t>5~6개월 · 3~4명</a:t>
+            </a:r>
+          </a:p>
+        </p:txBody>
+      </p:sp>
+      <p:sp>
+        <p:nvSpPr>
+          <p:cNvPr id="136" name="TextBox 135"/>
           <p:cNvSpPr txBox="1"/>
           <p:nvPr/>
         </p:nvSpPr>
         <p:spPr>
           <a:xfrm>
-            <a:off x="7348406" y="22860000"/>
+            <a:off x="7348406" y="22482000"/>
             <a:ext cx="3006633" cy="360000"/>
           </a:xfrm>
           <a:prstGeom prst="rect">
@@ -8849,20 +9283,20 @@
                 </a:solidFill>
                 <a:latin typeface="맑은 고딕"/>
               </a:rPr>
-              <a:t>3일 · 1명</a:t>
-            </a:r>
-          </a:p>
-        </p:txBody>
-      </p:sp>
-      <p:sp>
-        <p:nvSpPr>
-          <p:cNvPr id="128" name="Rectangle 127"/>
+              <a:t>6일 · 1명</a:t>
+            </a:r>
+          </a:p>
+        </p:txBody>
+      </p:sp>
+      <p:sp>
+        <p:nvSpPr>
+          <p:cNvPr id="137" name="Rectangle 136"/>
           <p:cNvSpPr/>
           <p:nvPr/>
         </p:nvSpPr>
         <p:spPr>
           <a:xfrm>
-            <a:off x="1512000" y="23745600"/>
+            <a:off x="1512000" y="23367600"/>
             <a:ext cx="8843040" cy="14400"/>
           </a:xfrm>
           <a:prstGeom prst="rect">
@@ -8900,13 +9334,13 @@
       </p:sp>
       <p:sp>
         <p:nvSpPr>
-          <p:cNvPr id="129" name="TextBox 128"/>
+          <p:cNvPr id="138" name="TextBox 137"/>
           <p:cNvSpPr txBox="1"/>
           <p:nvPr/>
         </p:nvSpPr>
         <p:spPr>
           <a:xfrm>
-            <a:off x="1692000" y="23389200"/>
+            <a:off x="1692000" y="23011200"/>
             <a:ext cx="2652912" cy="360000"/>
           </a:xfrm>
           <a:prstGeom prst="rect">
@@ -8942,13 +9376,13 @@
       </p:sp>
       <p:sp>
         <p:nvSpPr>
-          <p:cNvPr id="130" name="TextBox 129"/>
+          <p:cNvPr id="139" name="TextBox 138"/>
           <p:cNvSpPr txBox="1"/>
           <p:nvPr/>
         </p:nvSpPr>
         <p:spPr>
           <a:xfrm>
-            <a:off x="4164912" y="23389200"/>
+            <a:off x="4164912" y="23011200"/>
             <a:ext cx="3183494" cy="360000"/>
           </a:xfrm>
           <a:prstGeom prst="rect">
@@ -8977,20 +9411,20 @@
                 </a:solidFill>
                 <a:latin typeface="맑은 고딕"/>
               </a:rPr>
-              <a:t>약 2.0억 원</a:t>
-            </a:r>
-          </a:p>
-        </p:txBody>
-      </p:sp>
-      <p:sp>
-        <p:nvSpPr>
-          <p:cNvPr id="131" name="TextBox 130"/>
+              <a:t>약 2.3억 원</a:t>
+            </a:r>
+          </a:p>
+        </p:txBody>
+      </p:sp>
+      <p:sp>
+        <p:nvSpPr>
+          <p:cNvPr id="140" name="TextBox 139"/>
           <p:cNvSpPr txBox="1"/>
           <p:nvPr/>
         </p:nvSpPr>
         <p:spPr>
           <a:xfrm>
-            <a:off x="7348406" y="23382000"/>
+            <a:off x="7348406" y="23004000"/>
             <a:ext cx="3006633" cy="360000"/>
           </a:xfrm>
           <a:prstGeom prst="rect">
@@ -9019,20 +9453,20 @@
                 </a:solidFill>
                 <a:latin typeface="맑은 고딕"/>
               </a:rPr>
-              <a:t>약 250만 원</a:t>
-            </a:r>
-          </a:p>
-        </p:txBody>
-      </p:sp>
-      <p:sp>
-        <p:nvSpPr>
-          <p:cNvPr id="132" name="TextBox 131"/>
+              <a:t>약 313만 원</a:t>
+            </a:r>
+          </a:p>
+        </p:txBody>
+      </p:sp>
+      <p:sp>
+        <p:nvSpPr>
+          <p:cNvPr id="141" name="TextBox 140"/>
           <p:cNvSpPr txBox="1"/>
           <p:nvPr/>
         </p:nvSpPr>
         <p:spPr>
           <a:xfrm>
-            <a:off x="11076480" y="21672000"/>
+            <a:off x="11076480" y="21294000"/>
             <a:ext cx="8074080" cy="288000"/>
           </a:xfrm>
           <a:prstGeom prst="rect">
@@ -9068,13 +9502,13 @@
       </p:sp>
       <p:sp>
         <p:nvSpPr>
-          <p:cNvPr id="133" name="Rectangle 132"/>
+          <p:cNvPr id="142" name="Rectangle 141"/>
           <p:cNvSpPr/>
           <p:nvPr/>
         </p:nvSpPr>
         <p:spPr>
           <a:xfrm>
-            <a:off x="11076480" y="22032000"/>
+            <a:off x="11076480" y="21654000"/>
             <a:ext cx="8074080" cy="468000"/>
           </a:xfrm>
           <a:prstGeom prst="rect">
@@ -9112,13 +9546,13 @@
       </p:sp>
       <p:sp>
         <p:nvSpPr>
-          <p:cNvPr id="134" name="TextBox 133"/>
+          <p:cNvPr id="143" name="TextBox 142"/>
           <p:cNvSpPr txBox="1"/>
           <p:nvPr/>
         </p:nvSpPr>
         <p:spPr>
           <a:xfrm>
-            <a:off x="11292480" y="22147200"/>
+            <a:off x="11292480" y="21769200"/>
             <a:ext cx="7642080" cy="360000"/>
           </a:xfrm>
           <a:prstGeom prst="rect">
@@ -9147,20 +9581,20 @@
                 </a:solidFill>
                 <a:latin typeface="맑은 고딕"/>
               </a:rPr>
-              <a:t>외주 개발  약 2.0억 원</a:t>
-            </a:r>
-          </a:p>
-        </p:txBody>
-      </p:sp>
-      <p:sp>
-        <p:nvSpPr>
-          <p:cNvPr id="135" name="Rectangle 134"/>
+              <a:t>외주 개발  약 2.3억 원</a:t>
+            </a:r>
+          </a:p>
+        </p:txBody>
+      </p:sp>
+      <p:sp>
+        <p:nvSpPr>
+          <p:cNvPr id="144" name="Rectangle 143"/>
           <p:cNvSpPr/>
           <p:nvPr/>
         </p:nvSpPr>
         <p:spPr>
           <a:xfrm>
-            <a:off x="11076480" y="22644000"/>
+            <a:off x="11076480" y="22266000"/>
             <a:ext cx="8074080" cy="468000"/>
           </a:xfrm>
           <a:prstGeom prst="rect">
@@ -9198,13 +9632,13 @@
       </p:sp>
       <p:sp>
         <p:nvSpPr>
-          <p:cNvPr id="136" name="Rectangle 135"/>
+          <p:cNvPr id="145" name="Rectangle 144"/>
           <p:cNvSpPr/>
           <p:nvPr/>
         </p:nvSpPr>
         <p:spPr>
           <a:xfrm>
-            <a:off x="11076480" y="22644000"/>
+            <a:off x="11076480" y="22266000"/>
             <a:ext cx="144000" cy="468000"/>
           </a:xfrm>
           <a:prstGeom prst="rect">
@@ -9242,13 +9676,13 @@
       </p:sp>
       <p:sp>
         <p:nvSpPr>
-          <p:cNvPr id="137" name="TextBox 136"/>
+          <p:cNvPr id="146" name="TextBox 145"/>
           <p:cNvSpPr txBox="1"/>
           <p:nvPr/>
         </p:nvSpPr>
         <p:spPr>
           <a:xfrm>
-            <a:off x="11400480" y="22759200"/>
+            <a:off x="11400480" y="22381200"/>
             <a:ext cx="7642080" cy="360000"/>
           </a:xfrm>
           <a:prstGeom prst="rect">
@@ -9277,20 +9711,20 @@
                 </a:solidFill>
                 <a:latin typeface="맑은 고딕"/>
               </a:rPr>
-              <a:t>실제  약 250만 원  (1.3%)</a:t>
-            </a:r>
-          </a:p>
-        </p:txBody>
-      </p:sp>
-      <p:sp>
-        <p:nvSpPr>
-          <p:cNvPr id="138" name="Rounded Rectangle 137"/>
+              <a:t>실제  약 313만 원  (1.4%)</a:t>
+            </a:r>
+          </a:p>
+        </p:txBody>
+      </p:sp>
+      <p:sp>
+        <p:nvSpPr>
+          <p:cNvPr id="147" name="Rounded Rectangle 146"/>
           <p:cNvSpPr/>
           <p:nvPr/>
         </p:nvSpPr>
         <p:spPr>
           <a:xfrm>
-            <a:off x="11076480" y="23220000"/>
+            <a:off x="11076480" y="22842000"/>
             <a:ext cx="8074080" cy="684000"/>
           </a:xfrm>
           <a:prstGeom prst="roundRect">
@@ -9332,13 +9766,13 @@
       </p:sp>
       <p:sp>
         <p:nvSpPr>
-          <p:cNvPr id="139" name="TextBox 138"/>
+          <p:cNvPr id="148" name="TextBox 147"/>
           <p:cNvSpPr txBox="1"/>
           <p:nvPr/>
         </p:nvSpPr>
         <p:spPr>
           <a:xfrm>
-            <a:off x="11076480" y="23364000"/>
+            <a:off x="11076480" y="22986000"/>
             <a:ext cx="8074080" cy="504000"/>
           </a:xfrm>
           <a:prstGeom prst="rect">
@@ -9367,20 +9801,20 @@
                 </a:solidFill>
                 <a:latin typeface="맑은 고딕"/>
               </a:rPr>
-              <a:t>약 1억 9,750만 원 절감  ·  약 80배</a:t>
-            </a:r>
-          </a:p>
-        </p:txBody>
-      </p:sp>
-      <p:sp>
-        <p:nvSpPr>
-          <p:cNvPr id="140" name="Rectangle 139"/>
+              <a:t>약 2억 2,687만 원 절감  ·  약 74배</a:t>
+            </a:r>
+          </a:p>
+        </p:txBody>
+      </p:sp>
+      <p:sp>
+        <p:nvSpPr>
+          <p:cNvPr id="149" name="Rectangle 148"/>
           <p:cNvSpPr/>
           <p:nvPr/>
         </p:nvSpPr>
         <p:spPr>
           <a:xfrm>
-            <a:off x="1512000" y="24012000"/>
+            <a:off x="1512000" y="23634000"/>
             <a:ext cx="18360000" cy="18000"/>
           </a:xfrm>
           <a:prstGeom prst="rect">
@@ -9418,13 +9852,13 @@
       </p:sp>
       <p:sp>
         <p:nvSpPr>
-          <p:cNvPr id="141" name="TextBox 140"/>
+          <p:cNvPr id="150" name="TextBox 149"/>
           <p:cNvSpPr txBox="1"/>
           <p:nvPr/>
         </p:nvSpPr>
         <p:spPr>
           <a:xfrm>
-            <a:off x="1512000" y="24156000"/>
+            <a:off x="1512000" y="23778000"/>
             <a:ext cx="18360000" cy="972000"/>
           </a:xfrm>
           <a:prstGeom prst="rect">
@@ -9456,7 +9890,7 @@
                 </a:solidFill>
                 <a:latin typeface="맑은 고딕"/>
               </a:rPr>
-              <a:t>산출 근거   CRUD 행렬(엔티티 11 × API 56) → 기능점수 간이법 319 FP → 기능점수법·코드라인법·상향식 3중 교차검증 = 16 M/M (범위 13~20). 비용은 시장 실거래 단가·대가산정 가이드·FP 단가 세 방식(1.6~2.6억)의 중간값. 실제 비용의 AI 요금은 대화 2,060회·입력 8.3억 토큰 실측 기준 약 100만 원.</a:t>
+              <a:t>산출 근거   CRUD 행렬(엔티티 12 × API 64) → 기능점수 간이법 363 FP → 기능점수법·코드라인법·상향식 3중 교차검증 = 19 M/M (범위 15~23). 비용은 시장 실거래 단가·대가산정 가이드·FP 단가 세 방식(1.9~3.1억)의 중간값. 실제 비용의 AI 요금은 대화 2,702회·입력 11.0억 토큰 실측 기준 약 133만 원.</a:t>
             </a:r>
           </a:p>
           <a:p>
@@ -9478,20 +9912,20 @@
                 </a:solidFill>
                 <a:latin typeface="맑은 고딕"/>
               </a:rPr>
-              <a:t>이 차이의 절반은 AI의 구현 속도이고, 나머지 절반은 요구자·개발자·검수자가 같은 사람일 때 사라지는 회의·문서·검수 비용입니다 (외주 16 M/M 중 4.7 M/M, 29%).</a:t>
-            </a:r>
-          </a:p>
-        </p:txBody>
-      </p:sp>
-      <p:sp>
-        <p:nvSpPr>
-          <p:cNvPr id="142" name="Rounded Rectangle 141"/>
+              <a:t>이 차이의 절반은 AI의 구현 속도이고, 나머지 절반은 요구자·개발자·검수자가 같은 사람일 때 사라지는 회의·문서·검수 비용입니다 (외주 19 M/M 중 5.8 M/M, 31%).</a:t>
+            </a:r>
+          </a:p>
+        </p:txBody>
+      </p:sp>
+      <p:sp>
+        <p:nvSpPr>
+          <p:cNvPr id="151" name="Rounded Rectangle 150"/>
           <p:cNvSpPr/>
           <p:nvPr/>
         </p:nvSpPr>
         <p:spPr>
           <a:xfrm>
-            <a:off x="1080000" y="25596000"/>
+            <a:off x="1080000" y="25218000"/>
             <a:ext cx="468000" cy="468000"/>
           </a:xfrm>
           <a:prstGeom prst="roundRect">
@@ -9531,13 +9965,13 @@
       </p:sp>
       <p:sp>
         <p:nvSpPr>
-          <p:cNvPr id="143" name="TextBox 142"/>
+          <p:cNvPr id="152" name="TextBox 151"/>
           <p:cNvSpPr txBox="1"/>
           <p:nvPr/>
         </p:nvSpPr>
         <p:spPr>
           <a:xfrm>
-            <a:off x="1080000" y="25678800"/>
+            <a:off x="1080000" y="25300800"/>
             <a:ext cx="468000" cy="468000"/>
           </a:xfrm>
           <a:prstGeom prst="rect">
@@ -9573,13 +10007,13 @@
       </p:sp>
       <p:sp>
         <p:nvSpPr>
-          <p:cNvPr id="144" name="TextBox 143"/>
+          <p:cNvPr id="153" name="TextBox 152"/>
           <p:cNvSpPr txBox="1"/>
           <p:nvPr/>
         </p:nvSpPr>
         <p:spPr>
           <a:xfrm>
-            <a:off x="1764000" y="25574400"/>
+            <a:off x="1764000" y="25196400"/>
             <a:ext cx="18540000" cy="612000"/>
           </a:xfrm>
           <a:prstGeom prst="rect">
@@ -9615,13 +10049,13 @@
       </p:sp>
       <p:sp>
         <p:nvSpPr>
-          <p:cNvPr id="145" name="Rounded Rectangle 144"/>
+          <p:cNvPr id="154" name="Rounded Rectangle 153"/>
           <p:cNvSpPr/>
           <p:nvPr/>
         </p:nvSpPr>
         <p:spPr>
           <a:xfrm>
-            <a:off x="1080000" y="26280000"/>
+            <a:off x="1080000" y="25902000"/>
             <a:ext cx="9809280" cy="2520000"/>
           </a:xfrm>
           <a:prstGeom prst="roundRect">
@@ -9663,13 +10097,13 @@
       </p:sp>
       <p:sp>
         <p:nvSpPr>
-          <p:cNvPr id="146" name="TextBox 145"/>
+          <p:cNvPr id="155" name="TextBox 154"/>
           <p:cNvSpPr txBox="1"/>
           <p:nvPr/>
         </p:nvSpPr>
         <p:spPr>
           <a:xfrm>
-            <a:off x="1440000" y="26568000"/>
+            <a:off x="1440000" y="26190000"/>
             <a:ext cx="9089280" cy="288000"/>
           </a:xfrm>
           <a:prstGeom prst="rect">
@@ -9705,13 +10139,13 @@
       </p:sp>
       <p:sp>
         <p:nvSpPr>
-          <p:cNvPr id="147" name="Rounded Rectangle 146"/>
+          <p:cNvPr id="156" name="Rounded Rectangle 155"/>
           <p:cNvSpPr/>
           <p:nvPr/>
         </p:nvSpPr>
         <p:spPr>
           <a:xfrm>
-            <a:off x="1440000" y="27000000"/>
+            <a:off x="1440000" y="26622000"/>
             <a:ext cx="1436880" cy="486000"/>
           </a:xfrm>
           <a:prstGeom prst="roundRect">
@@ -9753,13 +10187,13 @@
       </p:sp>
       <p:sp>
         <p:nvSpPr>
-          <p:cNvPr id="148" name="TextBox 147"/>
+          <p:cNvPr id="157" name="TextBox 156"/>
           <p:cNvSpPr txBox="1"/>
           <p:nvPr/>
         </p:nvSpPr>
         <p:spPr>
           <a:xfrm>
-            <a:off x="1440000" y="27136800"/>
+            <a:off x="1440000" y="26758800"/>
             <a:ext cx="1436880" cy="324000"/>
           </a:xfrm>
           <a:prstGeom prst="rect">
@@ -9795,13 +10229,13 @@
       </p:sp>
       <p:sp>
         <p:nvSpPr>
-          <p:cNvPr id="149" name="Rounded Rectangle 148"/>
+          <p:cNvPr id="158" name="Rounded Rectangle 157"/>
           <p:cNvSpPr/>
           <p:nvPr/>
         </p:nvSpPr>
         <p:spPr>
           <a:xfrm>
-            <a:off x="2970480" y="27000000"/>
+            <a:off x="2970480" y="26622000"/>
             <a:ext cx="1436880" cy="486000"/>
           </a:xfrm>
           <a:prstGeom prst="roundRect">
@@ -9843,13 +10277,13 @@
       </p:sp>
       <p:sp>
         <p:nvSpPr>
-          <p:cNvPr id="150" name="TextBox 149"/>
+          <p:cNvPr id="159" name="TextBox 158"/>
           <p:cNvSpPr txBox="1"/>
           <p:nvPr/>
         </p:nvSpPr>
         <p:spPr>
           <a:xfrm>
-            <a:off x="2970480" y="27136800"/>
+            <a:off x="2970480" y="26758800"/>
             <a:ext cx="1436880" cy="324000"/>
           </a:xfrm>
           <a:prstGeom prst="rect">
@@ -9885,13 +10319,13 @@
       </p:sp>
       <p:sp>
         <p:nvSpPr>
-          <p:cNvPr id="151" name="Rounded Rectangle 150"/>
+          <p:cNvPr id="160" name="Rounded Rectangle 159"/>
           <p:cNvSpPr/>
           <p:nvPr/>
         </p:nvSpPr>
         <p:spPr>
           <a:xfrm>
-            <a:off x="4500960" y="27000000"/>
+            <a:off x="4500960" y="26622000"/>
             <a:ext cx="1436880" cy="486000"/>
           </a:xfrm>
           <a:prstGeom prst="roundRect">
@@ -9933,13 +10367,13 @@
       </p:sp>
       <p:sp>
         <p:nvSpPr>
-          <p:cNvPr id="152" name="TextBox 151"/>
+          <p:cNvPr id="161" name="TextBox 160"/>
           <p:cNvSpPr txBox="1"/>
           <p:nvPr/>
         </p:nvSpPr>
         <p:spPr>
           <a:xfrm>
-            <a:off x="4500960" y="27136800"/>
+            <a:off x="4500960" y="26758800"/>
             <a:ext cx="1436880" cy="324000"/>
           </a:xfrm>
           <a:prstGeom prst="rect">
@@ -9975,13 +10409,13 @@
       </p:sp>
       <p:sp>
         <p:nvSpPr>
-          <p:cNvPr id="153" name="Rounded Rectangle 152"/>
+          <p:cNvPr id="162" name="Rounded Rectangle 161"/>
           <p:cNvSpPr/>
           <p:nvPr/>
         </p:nvSpPr>
         <p:spPr>
           <a:xfrm>
-            <a:off x="6031440" y="27000000"/>
+            <a:off x="6031440" y="26622000"/>
             <a:ext cx="1436880" cy="486000"/>
           </a:xfrm>
           <a:prstGeom prst="roundRect">
@@ -10023,13 +10457,13 @@
       </p:sp>
       <p:sp>
         <p:nvSpPr>
-          <p:cNvPr id="154" name="TextBox 153"/>
+          <p:cNvPr id="163" name="TextBox 162"/>
           <p:cNvSpPr txBox="1"/>
           <p:nvPr/>
         </p:nvSpPr>
         <p:spPr>
           <a:xfrm>
-            <a:off x="6031440" y="27136800"/>
+            <a:off x="6031440" y="26758800"/>
             <a:ext cx="1436880" cy="324000"/>
           </a:xfrm>
           <a:prstGeom prst="rect">
@@ -10065,13 +10499,13 @@
       </p:sp>
       <p:sp>
         <p:nvSpPr>
-          <p:cNvPr id="155" name="Rounded Rectangle 154"/>
+          <p:cNvPr id="164" name="Rounded Rectangle 163"/>
           <p:cNvSpPr/>
           <p:nvPr/>
         </p:nvSpPr>
         <p:spPr>
           <a:xfrm>
-            <a:off x="7561920" y="27000000"/>
+            <a:off x="7561920" y="26622000"/>
             <a:ext cx="1436880" cy="486000"/>
           </a:xfrm>
           <a:prstGeom prst="roundRect">
@@ -10113,13 +10547,13 @@
       </p:sp>
       <p:sp>
         <p:nvSpPr>
-          <p:cNvPr id="156" name="TextBox 155"/>
+          <p:cNvPr id="165" name="TextBox 164"/>
           <p:cNvSpPr txBox="1"/>
           <p:nvPr/>
         </p:nvSpPr>
         <p:spPr>
           <a:xfrm>
-            <a:off x="7561920" y="27136800"/>
+            <a:off x="7561920" y="26758800"/>
             <a:ext cx="1436880" cy="324000"/>
           </a:xfrm>
           <a:prstGeom prst="rect">
@@ -10155,13 +10589,13 @@
       </p:sp>
       <p:sp>
         <p:nvSpPr>
-          <p:cNvPr id="157" name="Rounded Rectangle 156"/>
+          <p:cNvPr id="166" name="Rounded Rectangle 165"/>
           <p:cNvSpPr/>
           <p:nvPr/>
         </p:nvSpPr>
         <p:spPr>
           <a:xfrm>
-            <a:off x="9092400" y="27000000"/>
+            <a:off x="9092400" y="26622000"/>
             <a:ext cx="1436880" cy="486000"/>
           </a:xfrm>
           <a:prstGeom prst="roundRect">
@@ -10203,13 +10637,13 @@
       </p:sp>
       <p:sp>
         <p:nvSpPr>
-          <p:cNvPr id="158" name="TextBox 157"/>
+          <p:cNvPr id="167" name="TextBox 166"/>
           <p:cNvSpPr txBox="1"/>
           <p:nvPr/>
         </p:nvSpPr>
         <p:spPr>
           <a:xfrm>
-            <a:off x="9092400" y="27136800"/>
+            <a:off x="9092400" y="26758800"/>
             <a:ext cx="1436880" cy="324000"/>
           </a:xfrm>
           <a:prstGeom prst="rect">
@@ -10245,13 +10679,13 @@
       </p:sp>
       <p:sp>
         <p:nvSpPr>
-          <p:cNvPr id="159" name="TextBox 158"/>
+          <p:cNvPr id="168" name="TextBox 167"/>
           <p:cNvSpPr txBox="1"/>
           <p:nvPr/>
         </p:nvSpPr>
         <p:spPr>
           <a:xfrm>
-            <a:off x="1440000" y="27684000"/>
+            <a:off x="1440000" y="27306000"/>
             <a:ext cx="9089280" cy="936000"/>
           </a:xfrm>
           <a:prstGeom prst="rect">
@@ -10305,20 +10739,20 @@
                 </a:solidFill>
                 <a:latin typeface="맑은 고딕"/>
               </a:rPr>
-              <a:t>실사용 중 접수한 개선 요청 69건 중 59건 반영, 10건은 판단 대기.</a:t>
-            </a:r>
-          </a:p>
-        </p:txBody>
-      </p:sp>
-      <p:sp>
-        <p:nvSpPr>
-          <p:cNvPr id="160" name="Rounded Rectangle 159"/>
+              <a:t>실사용 중 접수한 개선 요청 80건 중 79건 반영, 1건은 판단 대기.</a:t>
+            </a:r>
+          </a:p>
+        </p:txBody>
+      </p:sp>
+      <p:sp>
+        <p:nvSpPr>
+          <p:cNvPr id="169" name="Rounded Rectangle 168"/>
           <p:cNvSpPr/>
           <p:nvPr/>
         </p:nvSpPr>
         <p:spPr>
           <a:xfrm>
-            <a:off x="11249280" y="26280000"/>
+            <a:off x="11249280" y="25902000"/>
             <a:ext cx="9054720" cy="2520000"/>
           </a:xfrm>
           <a:prstGeom prst="roundRect">
@@ -10358,13 +10792,13 @@
       </p:sp>
       <p:sp>
         <p:nvSpPr>
-          <p:cNvPr id="161" name="TextBox 160"/>
+          <p:cNvPr id="170" name="TextBox 169"/>
           <p:cNvSpPr txBox="1"/>
           <p:nvPr/>
         </p:nvSpPr>
         <p:spPr>
           <a:xfrm>
-            <a:off x="11609280" y="26568000"/>
+            <a:off x="11609280" y="26190000"/>
             <a:ext cx="8334719" cy="288000"/>
           </a:xfrm>
           <a:prstGeom prst="rect">
@@ -10400,13 +10834,13 @@
       </p:sp>
       <p:sp>
         <p:nvSpPr>
-          <p:cNvPr id="162" name="Rounded Rectangle 161"/>
+          <p:cNvPr id="171" name="Rounded Rectangle 170"/>
           <p:cNvSpPr/>
           <p:nvPr/>
         </p:nvSpPr>
         <p:spPr>
           <a:xfrm>
-            <a:off x="11609280" y="26938800"/>
+            <a:off x="11609280" y="26560800"/>
             <a:ext cx="540000" cy="288000"/>
           </a:xfrm>
           <a:prstGeom prst="roundRect">
@@ -10446,13 +10880,13 @@
       </p:sp>
       <p:sp>
         <p:nvSpPr>
-          <p:cNvPr id="163" name="TextBox 162"/>
+          <p:cNvPr id="172" name="TextBox 171"/>
           <p:cNvSpPr txBox="1"/>
           <p:nvPr/>
         </p:nvSpPr>
         <p:spPr>
           <a:xfrm>
-            <a:off x="11609280" y="26996400"/>
+            <a:off x="11609280" y="26618400"/>
             <a:ext cx="540000" cy="252000"/>
           </a:xfrm>
           <a:prstGeom prst="rect">
@@ -10488,13 +10922,13 @@
       </p:sp>
       <p:sp>
         <p:nvSpPr>
-          <p:cNvPr id="164" name="TextBox 163"/>
+          <p:cNvPr id="173" name="TextBox 172"/>
           <p:cNvSpPr txBox="1"/>
           <p:nvPr/>
         </p:nvSpPr>
         <p:spPr>
           <a:xfrm>
-            <a:off x="12329280" y="26942400"/>
+            <a:off x="12329280" y="26564400"/>
             <a:ext cx="7542719" cy="468000"/>
           </a:xfrm>
           <a:prstGeom prst="rect">
@@ -10533,13 +10967,13 @@
       </p:sp>
       <p:sp>
         <p:nvSpPr>
-          <p:cNvPr id="165" name="Rounded Rectangle 164"/>
+          <p:cNvPr id="174" name="Rounded Rectangle 173"/>
           <p:cNvSpPr/>
           <p:nvPr/>
         </p:nvSpPr>
         <p:spPr>
           <a:xfrm>
-            <a:off x="11609280" y="27356400"/>
+            <a:off x="11609280" y="26978400"/>
             <a:ext cx="540000" cy="288000"/>
           </a:xfrm>
           <a:prstGeom prst="roundRect">
@@ -10579,13 +11013,13 @@
       </p:sp>
       <p:sp>
         <p:nvSpPr>
-          <p:cNvPr id="166" name="TextBox 165"/>
+          <p:cNvPr id="175" name="TextBox 174"/>
           <p:cNvSpPr txBox="1"/>
           <p:nvPr/>
         </p:nvSpPr>
         <p:spPr>
           <a:xfrm>
-            <a:off x="11609280" y="27414000"/>
+            <a:off x="11609280" y="27036000"/>
             <a:ext cx="540000" cy="252000"/>
           </a:xfrm>
           <a:prstGeom prst="rect">
@@ -10621,13 +11055,13 @@
       </p:sp>
       <p:sp>
         <p:nvSpPr>
-          <p:cNvPr id="167" name="TextBox 166"/>
+          <p:cNvPr id="176" name="TextBox 175"/>
           <p:cNvSpPr txBox="1"/>
           <p:nvPr/>
         </p:nvSpPr>
         <p:spPr>
           <a:xfrm>
-            <a:off x="12329280" y="27360000"/>
+            <a:off x="12329280" y="26982000"/>
             <a:ext cx="7542719" cy="468000"/>
           </a:xfrm>
           <a:prstGeom prst="rect">
@@ -10666,13 +11100,13 @@
       </p:sp>
       <p:sp>
         <p:nvSpPr>
-          <p:cNvPr id="168" name="Rounded Rectangle 167"/>
+          <p:cNvPr id="177" name="Rounded Rectangle 176"/>
           <p:cNvSpPr/>
           <p:nvPr/>
         </p:nvSpPr>
         <p:spPr>
           <a:xfrm>
-            <a:off x="11609280" y="27774000"/>
+            <a:off x="11609280" y="27396000"/>
             <a:ext cx="540000" cy="288000"/>
           </a:xfrm>
           <a:prstGeom prst="roundRect">
@@ -10712,13 +11146,13 @@
       </p:sp>
       <p:sp>
         <p:nvSpPr>
-          <p:cNvPr id="169" name="TextBox 168"/>
+          <p:cNvPr id="178" name="TextBox 177"/>
           <p:cNvSpPr txBox="1"/>
           <p:nvPr/>
         </p:nvSpPr>
         <p:spPr>
           <a:xfrm>
-            <a:off x="11609280" y="27831600"/>
+            <a:off x="11609280" y="27453600"/>
             <a:ext cx="540000" cy="252000"/>
           </a:xfrm>
           <a:prstGeom prst="rect">
@@ -10754,13 +11188,13 @@
       </p:sp>
       <p:sp>
         <p:nvSpPr>
-          <p:cNvPr id="170" name="TextBox 169"/>
+          <p:cNvPr id="179" name="TextBox 178"/>
           <p:cNvSpPr txBox="1"/>
           <p:nvPr/>
         </p:nvSpPr>
         <p:spPr>
           <a:xfrm>
-            <a:off x="12329280" y="27777600"/>
+            <a:off x="12329280" y="27399600"/>
             <a:ext cx="7542719" cy="468000"/>
           </a:xfrm>
           <a:prstGeom prst="rect">
@@ -10799,13 +11233,13 @@
       </p:sp>
       <p:sp>
         <p:nvSpPr>
-          <p:cNvPr id="171" name="Rounded Rectangle 170"/>
+          <p:cNvPr id="180" name="Rounded Rectangle 179"/>
           <p:cNvSpPr/>
           <p:nvPr/>
         </p:nvSpPr>
         <p:spPr>
           <a:xfrm>
-            <a:off x="11609280" y="28191600"/>
+            <a:off x="11609280" y="27813600"/>
             <a:ext cx="540000" cy="288000"/>
           </a:xfrm>
           <a:prstGeom prst="roundRect">
@@ -10845,13 +11279,13 @@
       </p:sp>
       <p:sp>
         <p:nvSpPr>
-          <p:cNvPr id="172" name="TextBox 171"/>
+          <p:cNvPr id="181" name="TextBox 180"/>
           <p:cNvSpPr txBox="1"/>
           <p:nvPr/>
         </p:nvSpPr>
         <p:spPr>
           <a:xfrm>
-            <a:off x="11609280" y="28249200"/>
+            <a:off x="11609280" y="27871200"/>
             <a:ext cx="540000" cy="252000"/>
           </a:xfrm>
           <a:prstGeom prst="rect">
@@ -10887,13 +11321,13 @@
       </p:sp>
       <p:sp>
         <p:nvSpPr>
-          <p:cNvPr id="173" name="TextBox 172"/>
+          <p:cNvPr id="182" name="TextBox 181"/>
           <p:cNvSpPr txBox="1"/>
           <p:nvPr/>
         </p:nvSpPr>
         <p:spPr>
           <a:xfrm>
-            <a:off x="12329280" y="28195200"/>
+            <a:off x="12329280" y="27817200"/>
             <a:ext cx="7542719" cy="468000"/>
           </a:xfrm>
           <a:prstGeom prst="rect">
@@ -10932,13 +11366,13 @@
       </p:sp>
       <p:sp>
         <p:nvSpPr>
-          <p:cNvPr id="174" name="Rectangle 173"/>
+          <p:cNvPr id="183" name="Rectangle 182"/>
           <p:cNvSpPr/>
           <p:nvPr/>
         </p:nvSpPr>
         <p:spPr>
           <a:xfrm>
-            <a:off x="1080000" y="29016000"/>
+            <a:off x="1080000" y="28638000"/>
             <a:ext cx="19224000" cy="21600"/>
           </a:xfrm>
           <a:prstGeom prst="rect">
@@ -10976,13 +11410,13 @@
       </p:sp>
       <p:sp>
         <p:nvSpPr>
-          <p:cNvPr id="175" name="TextBox 174"/>
+          <p:cNvPr id="184" name="TextBox 183"/>
           <p:cNvSpPr txBox="1"/>
           <p:nvPr/>
         </p:nvSpPr>
         <p:spPr>
           <a:xfrm>
-            <a:off x="1080000" y="29160000"/>
+            <a:off x="1080000" y="28782000"/>
             <a:ext cx="19224000" cy="576000"/>
           </a:xfrm>
           <a:prstGeom prst="rect">
@@ -11014,7 +11448,7 @@
                 </a:solidFill>
                 <a:latin typeface="맑은 고딕"/>
               </a:rPr>
-              <a:t>규모·기간·시험 건수는 2026-09-04 실측치입니다. 외주 비용은 기능점수 기반 추정이며, 단가(시장 단가·직접인건비·FP 단가)는 가정값이므로 「소프트웨어사업 대가산정 가이드」와 「SW기술자 평균임금」 최신 공표치로 대체해 확인하시기 바랍니다.</a:t>
+              <a:t>규모·기간·시험 건수는 2026-09-07 실측치입니다. 외주 비용은 기능점수 기반 추정이며, 단가(시장 단가·직접인건비·FP 단가)는 가정값이므로 「소프트웨어사업 대가산정 가이드」와 「SW기술자 평균임금」 최신 공표치로 대체해 확인하시기 바랍니다.</a:t>
             </a:r>
           </a:p>
         </p:txBody>

--- a/docs/poster/AX성과공유회_포스터_개발을기다리지않았다.pptx
+++ b/docs/poster/AX성과공유회_포스터_개발을기다리지않았다.pptx
@@ -7785,7 +7785,7 @@
                 </a:solidFill>
                 <a:latin typeface="맑은 고딕"/>
               </a:rPr>
-              <a:t>15,758줄</a:t>
+              <a:t>16,222줄</a:t>
             </a:r>
           </a:p>
         </p:txBody>
@@ -8041,7 +8041,7 @@
                 </a:solidFill>
                 <a:latin typeface="맑은 고딕"/>
               </a:rPr>
-              <a:t>457건</a:t>
+              <a:t>477건</a:t>
             </a:r>
           </a:p>
         </p:txBody>
@@ -8553,7 +8553,7 @@
                 </a:solidFill>
                 <a:latin typeface="맑은 고딕"/>
               </a:rPr>
-              <a:t>79건/80건</a:t>
+              <a:t>89건/90건</a:t>
             </a:r>
           </a:p>
         </p:txBody>
@@ -10739,7 +10739,7 @@
                 </a:solidFill>
                 <a:latin typeface="맑은 고딕"/>
               </a:rPr>
-              <a:t>실사용 중 접수한 개선 요청 80건 중 79건 반영, 1건은 판단 대기.</a:t>
+              <a:t>접수·점검한 개선 90건 중 89건 반영, 1건은 판단 대기.</a:t>
             </a:r>
           </a:p>
         </p:txBody>

--- a/docs/poster/AX성과공유회_포스터_개발을기다리지않았다.pptx
+++ b/docs/poster/AX성과공유회_포스터_개발을기다리지않았다.pptx
@@ -7785,7 +7785,7 @@
                 </a:solidFill>
                 <a:latin typeface="맑은 고딕"/>
               </a:rPr>
-              <a:t>16,222줄</a:t>
+              <a:t>16,415줄</a:t>
             </a:r>
           </a:p>
         </p:txBody>
@@ -8041,7 +8041,7 @@
                 </a:solidFill>
                 <a:latin typeface="맑은 고딕"/>
               </a:rPr>
-              <a:t>477건</a:t>
+              <a:t>486건</a:t>
             </a:r>
           </a:p>
         </p:txBody>
@@ -8553,7 +8553,7 @@
                 </a:solidFill>
                 <a:latin typeface="맑은 고딕"/>
               </a:rPr>
-              <a:t>89건/90건</a:t>
+              <a:t>90건/91건</a:t>
             </a:r>
           </a:p>
         </p:txBody>
@@ -10739,7 +10739,7 @@
                 </a:solidFill>
                 <a:latin typeface="맑은 고딕"/>
               </a:rPr>
-              <a:t>접수·점검한 개선 90건 중 89건 반영, 1건은 판단 대기.</a:t>
+              <a:t>접수·점검한 개선 91건 중 90건 반영, 1건은 판단 대기.</a:t>
             </a:r>
           </a:p>
         </p:txBody>

--- a/docs/poster/AX성과공유회_포스터_개발을기다리지않았다.pptx
+++ b/docs/poster/AX성과공유회_포스터_개발을기다리지않았다.pptx
@@ -7785,7 +7785,7 @@
                 </a:solidFill>
                 <a:latin typeface="맑은 고딕"/>
               </a:rPr>
-              <a:t>16,415줄</a:t>
+              <a:t>16,746줄</a:t>
             </a:r>
           </a:p>
         </p:txBody>
@@ -8041,7 +8041,7 @@
                 </a:solidFill>
                 <a:latin typeface="맑은 고딕"/>
               </a:rPr>
-              <a:t>486건</a:t>
+              <a:t>499건</a:t>
             </a:r>
           </a:p>
         </p:txBody>
@@ -8297,7 +8297,7 @@
                 </a:solidFill>
                 <a:latin typeface="맑은 고딕"/>
               </a:rPr>
-              <a:t>10개</a:t>
+              <a:t>11개</a:t>
             </a:r>
           </a:p>
         </p:txBody>
@@ -8553,7 +8553,7 @@
                 </a:solidFill>
                 <a:latin typeface="맑은 고딕"/>
               </a:rPr>
-              <a:t>90건/91건</a:t>
+              <a:t>91건/92건</a:t>
             </a:r>
           </a:p>
         </p:txBody>
@@ -10739,7 +10739,7 @@
                 </a:solidFill>
                 <a:latin typeface="맑은 고딕"/>
               </a:rPr>
-              <a:t>접수·점검한 개선 91건 중 90건 반영, 1건은 판단 대기.</a:t>
+              <a:t>접수·점검한 개선 92건 중 91건 반영, 1건은 판단 대기.</a:t>
             </a:r>
           </a:p>
         </p:txBody>

--- a/docs/poster/AX성과공유회_포스터_개발을기다리지않았다.pptx
+++ b/docs/poster/AX성과공유회_포스터_개발을기다리지않았다.pptx
@@ -7785,7 +7785,7 @@
                 </a:solidFill>
                 <a:latin typeface="맑은 고딕"/>
               </a:rPr>
-              <a:t>16,746줄</a:t>
+              <a:t>16,764줄</a:t>
             </a:r>
           </a:p>
         </p:txBody>
@@ -8041,7 +8041,7 @@
                 </a:solidFill>
                 <a:latin typeface="맑은 고딕"/>
               </a:rPr>
-              <a:t>499건</a:t>
+              <a:t>501건</a:t>
             </a:r>
           </a:p>
         </p:txBody>
